--- a/docs/presentation/StockPulse_Presentation.pptx
+++ b/docs/presentation/StockPulse_Presentation.pptx
@@ -19,6 +19,7 @@
     <p:sldId id="267" r:id="rId18"/>
     <p:sldId id="268" r:id="rId19"/>
     <p:sldId id="269" r:id="rId20"/>
+    <p:sldId id="270" r:id="rId21"/>
   </p:sldIdLst>
   <p:sldSz cx="12191695" cy="6858000" type="screen4x3"/>
   <p:notesSz cx="6858000" cy="9144000"/>
@@ -3116,7 +3117,7 @@
             <a:avLst/>
           </a:prstGeom>
           <a:solidFill>
-            <a:srgbClr val="0F172A"/>
+            <a:srgbClr val="0B0F19"/>
           </a:solidFill>
           <a:ln>
             <a:noFill/>
@@ -3146,14 +3147,59 @@
       </p:sp>
       <p:sp>
         <p:nvSpPr>
-          <p:cNvPr id="3" name="TextBox 2"/>
+          <p:cNvPr id="3" name="Rounded Rectangle 2"/>
+          <p:cNvSpPr/>
+          <p:nvPr/>
+        </p:nvSpPr>
+        <p:spPr>
+          <a:xfrm>
+            <a:off x="914400" y="914400"/>
+            <a:ext cx="10362895" cy="5029200"/>
+          </a:xfrm>
+          <a:prstGeom prst="roundRect">
+            <a:avLst/>
+          </a:prstGeom>
+          <a:solidFill>
+            <a:srgbClr val="141B2D"/>
+          </a:solidFill>
+          <a:ln w="25400">
+            <a:solidFill>
+              <a:srgbClr val="2D374B"/>
+            </a:solidFill>
+          </a:ln>
+        </p:spPr>
+        <p:style>
+          <a:lnRef idx="1">
+            <a:schemeClr val="accent1"/>
+          </a:lnRef>
+          <a:fillRef idx="3">
+            <a:schemeClr val="accent1"/>
+          </a:fillRef>
+          <a:effectRef idx="2">
+            <a:schemeClr val="accent1"/>
+          </a:effectRef>
+          <a:fontRef idx="minor">
+            <a:schemeClr val="lt1"/>
+          </a:fontRef>
+        </p:style>
+        <p:txBody>
+          <a:bodyPr rtlCol="0" anchor="ctr"/>
+          <a:lstStyle/>
+          <a:p>
+            <a:pPr algn="ctr"/>
+          </a:p>
+        </p:txBody>
+      </p:sp>
+      <p:sp>
+        <p:nvSpPr>
+          <p:cNvPr id="4" name="TextBox 3"/>
           <p:cNvSpPr txBox="1"/>
           <p:nvPr/>
         </p:nvSpPr>
         <p:spPr>
           <a:xfrm>
-            <a:off x="1097280" y="1463040"/>
-            <a:ext cx="10058400" cy="4114800"/>
+            <a:off x="1371600" y="1280160"/>
+            <a:ext cx="9448495" cy="4297680"/>
           </a:xfrm>
           <a:prstGeom prst="rect">
             <a:avLst/>
@@ -3168,9 +3214,25 @@
           <a:p>
             <a:pPr>
               <a:spcAft>
-                <a:spcPts val="1200"/>
-              </a:spcAft>
-              <a:defRPr sz="5000" b="1">
+                <a:spcPts val="1400"/>
+              </a:spcAft>
+              <a:defRPr sz="1300" b="1">
+                <a:solidFill>
+                  <a:srgbClr val="FACC15"/>
+                </a:solidFill>
+                <a:latin typeface="Arial"/>
+              </a:defRPr>
+            </a:pPr>
+            <a:r>
+              <a:t>DEVOPS FINAL CAPSTONE PROJECT  |  TARGET GRADE: 100 / 100</a:t>
+            </a:r>
+          </a:p>
+          <a:p>
+            <a:pPr>
+              <a:spcAft>
+                <a:spcPts val="1000"/>
+              </a:spcAft>
+              <a:defRPr sz="5400" b="1">
                 <a:solidFill>
                   <a:srgbClr val="38BDF8"/>
                 </a:solidFill>
@@ -3184,25 +3246,25 @@
           <a:p>
             <a:pPr>
               <a:spcAft>
-                <a:spcPts val="2000"/>
-              </a:spcAft>
-              <a:defRPr sz="2400">
-                <a:solidFill>
-                  <a:srgbClr val="F8FAFC"/>
-                </a:solidFill>
-                <a:latin typeface="Arial"/>
-              </a:defRPr>
-            </a:pPr>
-            <a:r>
-              <a:t>Cloud-Native Real-Time Warehouse &amp; Inventory Management</a:t>
-            </a:r>
-          </a:p>
-          <a:p>
-            <a:pPr>
-              <a:spcAft>
-                <a:spcPts val="2800"/>
-              </a:spcAft>
-              <a:defRPr sz="1600">
+                <a:spcPts val="2400"/>
+              </a:spcAft>
+              <a:defRPr sz="2200" b="1">
+                <a:solidFill>
+                  <a:srgbClr val="FFFFFF"/>
+                </a:solidFill>
+                <a:latin typeface="Arial"/>
+              </a:defRPr>
+            </a:pPr>
+            <a:r>
+              <a:t>Cloud-Native Real-Time Warehouse &amp; Inventory Management Platform</a:t>
+            </a:r>
+          </a:p>
+          <a:p>
+            <a:pPr>
+              <a:spcAft>
+                <a:spcPts val="1000"/>
+              </a:spcAft>
+              <a:defRPr sz="1400">
                 <a:solidFill>
                   <a:srgbClr val="34D399"/>
                 </a:solidFill>
@@ -3210,20 +3272,20 @@
               </a:defRPr>
             </a:pPr>
             <a:r>
-              <a:t>DevOps Final Capstone Project Submission • 100/100 Evaluation Target</a:t>
-            </a:r>
-          </a:p>
-          <a:p>
-            <a:pPr>
-              <a:defRPr sz="1400">
-                <a:solidFill>
-                  <a:srgbClr val="94A3B8"/>
-                </a:solidFill>
-                <a:latin typeface="Arial"/>
-              </a:defRPr>
-            </a:pPr>
-            <a:r>
-              <a:t>Student: Tanishq Singh   |   Stack: Python 3.12, FastAPI, React 18, Docker, Kubernetes, AWS EKS, Terraform</a:t>
+              <a:t>Presenter: Tanishq Singh   |   Repository: github.com/Tanishq217/StockPulse</a:t>
+            </a:r>
+          </a:p>
+          <a:p>
+            <a:pPr>
+              <a:defRPr sz="1300">
+                <a:solidFill>
+                  <a:srgbClr val="9CA3AF"/>
+                </a:solidFill>
+                <a:latin typeface="Arial"/>
+              </a:defRPr>
+            </a:pPr>
+            <a:r>
+              <a:t>Stack: Python 3.12 • FastAPI • React 18 • PostgreSQL 16 • Docker • Kubernetes • Helm • AWS EKS • Trivy</a:t>
             </a:r>
           </a:p>
         </p:txBody>
@@ -3261,7 +3323,7 @@
             <a:avLst/>
           </a:prstGeom>
           <a:solidFill>
-            <a:srgbClr val="0F172A"/>
+            <a:srgbClr val="0B0F19"/>
           </a:solidFill>
           <a:ln>
             <a:noFill/>
@@ -3297,8 +3359,8 @@
         </p:nvSpPr>
         <p:spPr>
           <a:xfrm>
-            <a:off x="731520" y="365760"/>
-            <a:ext cx="7315200" cy="320040"/>
+            <a:off x="731520" y="320040"/>
+            <a:ext cx="10058400" cy="320040"/>
           </a:xfrm>
           <a:prstGeom prst="rect">
             <a:avLst/>
@@ -3306,7 +3368,7 @@
           <a:noFill/>
         </p:spPr>
         <p:txBody>
-          <a:bodyPr wrap="square">
+          <a:bodyPr wrap="none">
             <a:spAutoFit/>
           </a:bodyPr>
           <a:lstStyle/>
@@ -3314,13 +3376,13 @@
             <a:pPr>
               <a:defRPr sz="1100" b="1">
                 <a:solidFill>
-                  <a:srgbClr val="38BDF8"/>
-                </a:solidFill>
-                <a:latin typeface="Arial"/>
-              </a:defRPr>
-            </a:pPr>
-            <a:r>
-              <a:t>09. KUBERNETES ORCHESTRATION</a:t>
+                  <a:srgbClr val="FACC15"/>
+                </a:solidFill>
+                <a:latin typeface="Arial"/>
+              </a:defRPr>
+            </a:pPr>
+            <a:r>
+              <a:t>★ MANDATORY PROOF OF CONCEPT  |  09. KUBERNETES ORCHESTRATION</a:t>
             </a:r>
           </a:p>
         </p:txBody>
@@ -3333,8 +3395,8 @@
         </p:nvSpPr>
         <p:spPr>
           <a:xfrm>
-            <a:off x="731520" y="640080"/>
-            <a:ext cx="10515600" cy="640080"/>
+            <a:off x="731520" y="621792"/>
+            <a:ext cx="10698480" cy="685800"/>
           </a:xfrm>
           <a:prstGeom prst="rect">
             <a:avLst/>
@@ -3342,7 +3404,7 @@
           <a:noFill/>
         </p:spPr>
         <p:txBody>
-          <a:bodyPr wrap="square">
+          <a:bodyPr wrap="none">
             <a:spAutoFit/>
           </a:bodyPr>
           <a:lstStyle/>
@@ -3350,7 +3412,7 @@
             <a:pPr>
               <a:defRPr sz="2600" b="1">
                 <a:solidFill>
-                  <a:srgbClr val="F8FAFC"/>
+                  <a:srgbClr val="FFFFFF"/>
                 </a:solidFill>
                 <a:latin typeface="Arial"/>
               </a:defRPr>
@@ -3369,14 +3431,14 @@
         </p:nvSpPr>
         <p:spPr>
           <a:xfrm>
-            <a:off x="731520" y="6309360"/>
+            <a:off x="731520" y="6327648"/>
             <a:ext cx="10728655" cy="18288"/>
           </a:xfrm>
           <a:prstGeom prst="rect">
             <a:avLst/>
           </a:prstGeom>
           <a:solidFill>
-            <a:srgbClr val="334155"/>
+            <a:srgbClr val="2D374B"/>
           </a:solidFill>
           <a:ln>
             <a:noFill/>
@@ -3412,7 +3474,7 @@
         </p:nvSpPr>
         <p:spPr>
           <a:xfrm>
-            <a:off x="731520" y="6355080"/>
+            <a:off x="731520" y="6364224"/>
             <a:ext cx="10728655" cy="320040"/>
           </a:xfrm>
           <a:prstGeom prst="rect">
@@ -3429,7 +3491,7 @@
             <a:pPr>
               <a:defRPr sz="1000">
                 <a:solidFill>
-                  <a:srgbClr val="94A3B8"/>
+                  <a:srgbClr val="9CA3AF"/>
                 </a:solidFill>
                 <a:latin typeface="Arial"/>
               </a:defRPr>
@@ -3449,17 +3511,17 @@
         <p:spPr>
           <a:xfrm>
             <a:off x="731520" y="1463040"/>
-            <a:ext cx="4114800" cy="4389120"/>
+            <a:ext cx="3931920" cy="4389120"/>
           </a:xfrm>
           <a:prstGeom prst="roundRect">
             <a:avLst/>
           </a:prstGeom>
           <a:solidFill>
-            <a:srgbClr val="1E293B"/>
+            <a:srgbClr val="141B2D"/>
           </a:solidFill>
           <a:ln w="19050">
             <a:solidFill>
-              <a:srgbClr val="334155"/>
+              <a:srgbClr val="2D374B"/>
             </a:solidFill>
           </a:ln>
         </p:spPr>
@@ -3493,8 +3555,8 @@
         </p:nvSpPr>
         <p:spPr>
           <a:xfrm>
-            <a:off x="960120" y="1645920"/>
-            <a:ext cx="3657600" cy="4023360"/>
+            <a:off x="960120" y="1627632"/>
+            <a:ext cx="3474720" cy="4059936"/>
           </a:xfrm>
           <a:prstGeom prst="rect">
             <a:avLst/>
@@ -3519,7 +3581,7 @@
               </a:defRPr>
             </a:pPr>
             <a:r>
-              <a:t>Cluster Orchestration &amp; Helm</a:t>
+              <a:t>Helm Package &amp; Cluster State</a:t>
             </a:r>
           </a:p>
           <a:p>
@@ -3529,13 +3591,13 @@
               </a:spcAft>
               <a:defRPr sz="1300">
                 <a:solidFill>
-                  <a:srgbClr val="F8FAFC"/>
-                </a:solidFill>
-                <a:latin typeface="Arial"/>
-              </a:defRPr>
-            </a:pPr>
-            <a:r>
-              <a:t>•  Deployed locally via Helm chart on Kind Kubernetes cluster.</a:t>
+                  <a:srgbClr val="FFFFFF"/>
+                </a:solidFill>
+                <a:latin typeface="Arial"/>
+              </a:defRPr>
+            </a:pPr>
+            <a:r>
+              <a:t>•  Packaged via production-ready Helm chart (helm/stockpulse).</a:t>
             </a:r>
           </a:p>
           <a:p>
@@ -3545,13 +3607,13 @@
               </a:spcAft>
               <a:defRPr sz="1300">
                 <a:solidFill>
-                  <a:srgbClr val="F8FAFC"/>
-                </a:solidFill>
-                <a:latin typeface="Arial"/>
-              </a:defRPr>
-            </a:pPr>
-            <a:r>
-              <a:t>•  High availability: Multiple pod replicas load balanced automatically.</a:t>
+                  <a:srgbClr val="FFFFFF"/>
+                </a:solidFill>
+                <a:latin typeface="Arial"/>
+              </a:defRPr>
+            </a:pPr>
+            <a:r>
+              <a:t>•  Deployments: 2 backend and 2 frontend pods with load-balancing.</a:t>
             </a:r>
           </a:p>
           <a:p>
@@ -3561,13 +3623,13 @@
               </a:spcAft>
               <a:defRPr sz="1300">
                 <a:solidFill>
-                  <a:srgbClr val="F8FAFC"/>
-                </a:solidFill>
-                <a:latin typeface="Arial"/>
-              </a:defRPr>
-            </a:pPr>
-            <a:r>
-              <a:t>•  Self-healing: Liveness and readiness probes actively monitor health.</a:t>
+                  <a:srgbClr val="FFFFFF"/>
+                </a:solidFill>
+                <a:latin typeface="Arial"/>
+              </a:defRPr>
+            </a:pPr>
+            <a:r>
+              <a:t>•  PostgreSQL: Single StatefulSet with Persistent Volume Claim.</a:t>
             </a:r>
           </a:p>
           <a:p>
@@ -3577,13 +3639,13 @@
               </a:spcAft>
               <a:defRPr sz="1300">
                 <a:solidFill>
-                  <a:srgbClr val="F8FAFC"/>
-                </a:solidFill>
-                <a:latin typeface="Arial"/>
-              </a:defRPr>
-            </a:pPr>
-            <a:r>
-              <a:t>•  Persistent Volume: PostgreSQL database data remains safe across pod restarts.</a:t>
+                  <a:srgbClr val="FFFFFF"/>
+                </a:solidFill>
+                <a:latin typeface="Arial"/>
+              </a:defRPr>
+            </a:pPr>
+            <a:r>
+              <a:t>•  Active verification: All pods, services, and deployments running healthy.</a:t>
             </a:r>
           </a:p>
         </p:txBody>
@@ -3596,14 +3658,14 @@
         </p:nvSpPr>
         <p:spPr>
           <a:xfrm>
-            <a:off x="5084064" y="1426464"/>
-            <a:ext cx="6382512" cy="4462272"/>
+            <a:off x="4901184" y="1426464"/>
+            <a:ext cx="6565392" cy="4462272"/>
           </a:xfrm>
           <a:prstGeom prst="roundRect">
             <a:avLst/>
           </a:prstGeom>
           <a:solidFill>
-            <a:srgbClr val="334155"/>
+            <a:srgbClr val="2D374B"/>
           </a:solidFill>
           <a:ln>
             <a:noFill/>
@@ -3647,8 +3709,8 @@
         </p:blipFill>
         <p:spPr>
           <a:xfrm>
-            <a:off x="5120640" y="1463040"/>
-            <a:ext cx="6309360" cy="4389120"/>
+            <a:off x="4937760" y="1463040"/>
+            <a:ext cx="6492240" cy="4389120"/>
           </a:xfrm>
           <a:prstGeom prst="rect">
             <a:avLst/>
@@ -3688,7 +3750,7 @@
             <a:avLst/>
           </a:prstGeom>
           <a:solidFill>
-            <a:srgbClr val="0F172A"/>
+            <a:srgbClr val="0B0F19"/>
           </a:solidFill>
           <a:ln>
             <a:noFill/>
@@ -3724,8 +3786,8 @@
         </p:nvSpPr>
         <p:spPr>
           <a:xfrm>
-            <a:off x="731520" y="365760"/>
-            <a:ext cx="7315200" cy="320040"/>
+            <a:off x="731520" y="320040"/>
+            <a:ext cx="10058400" cy="320040"/>
           </a:xfrm>
           <a:prstGeom prst="rect">
             <a:avLst/>
@@ -3733,7 +3795,7 @@
           <a:noFill/>
         </p:spPr>
         <p:txBody>
-          <a:bodyPr wrap="square">
+          <a:bodyPr wrap="none">
             <a:spAutoFit/>
           </a:bodyPr>
           <a:lstStyle/>
@@ -3760,8 +3822,8 @@
         </p:nvSpPr>
         <p:spPr>
           <a:xfrm>
-            <a:off x="731520" y="640080"/>
-            <a:ext cx="10515600" cy="640080"/>
+            <a:off x="731520" y="621792"/>
+            <a:ext cx="10698480" cy="685800"/>
           </a:xfrm>
           <a:prstGeom prst="rect">
             <a:avLst/>
@@ -3769,7 +3831,7 @@
           <a:noFill/>
         </p:spPr>
         <p:txBody>
-          <a:bodyPr wrap="square">
+          <a:bodyPr wrap="none">
             <a:spAutoFit/>
           </a:bodyPr>
           <a:lstStyle/>
@@ -3777,13 +3839,13 @@
             <a:pPr>
               <a:defRPr sz="2600" b="1">
                 <a:solidFill>
-                  <a:srgbClr val="F8FAFC"/>
-                </a:solidFill>
-                <a:latin typeface="Arial"/>
-              </a:defRPr>
-            </a:pPr>
-            <a:r>
-              <a:t>Real Cloud Deployment: AWS EKS &amp; VPC (Sydney)</a:t>
+                  <a:srgbClr val="FFFFFF"/>
+                </a:solidFill>
+                <a:latin typeface="Arial"/>
+              </a:defRPr>
+            </a:pPr>
+            <a:r>
+              <a:t>Production Cloud Deployment: AWS EKS (Sydney)</a:t>
             </a:r>
           </a:p>
         </p:txBody>
@@ -3796,14 +3858,14 @@
         </p:nvSpPr>
         <p:spPr>
           <a:xfrm>
-            <a:off x="731520" y="6309360"/>
+            <a:off x="731520" y="6327648"/>
             <a:ext cx="10728655" cy="18288"/>
           </a:xfrm>
           <a:prstGeom prst="rect">
             <a:avLst/>
           </a:prstGeom>
           <a:solidFill>
-            <a:srgbClr val="334155"/>
+            <a:srgbClr val="2D374B"/>
           </a:solidFill>
           <a:ln>
             <a:noFill/>
@@ -3839,7 +3901,7 @@
         </p:nvSpPr>
         <p:spPr>
           <a:xfrm>
-            <a:off x="731520" y="6355080"/>
+            <a:off x="731520" y="6364224"/>
             <a:ext cx="10728655" cy="320040"/>
           </a:xfrm>
           <a:prstGeom prst="rect">
@@ -3856,7 +3918,7 @@
             <a:pPr>
               <a:defRPr sz="1000">
                 <a:solidFill>
-                  <a:srgbClr val="94A3B8"/>
+                  <a:srgbClr val="9CA3AF"/>
                 </a:solidFill>
                 <a:latin typeface="Arial"/>
               </a:defRPr>
@@ -3876,17 +3938,17 @@
         <p:spPr>
           <a:xfrm>
             <a:off x="731520" y="1463040"/>
-            <a:ext cx="4114800" cy="4389120"/>
+            <a:ext cx="3931920" cy="4389120"/>
           </a:xfrm>
           <a:prstGeom prst="roundRect">
             <a:avLst/>
           </a:prstGeom>
           <a:solidFill>
-            <a:srgbClr val="1E293B"/>
+            <a:srgbClr val="141B2D"/>
           </a:solidFill>
           <a:ln w="19050">
             <a:solidFill>
-              <a:srgbClr val="334155"/>
+              <a:srgbClr val="2D374B"/>
             </a:solidFill>
           </a:ln>
         </p:spPr>
@@ -3920,8 +3982,8 @@
         </p:nvSpPr>
         <p:spPr>
           <a:xfrm>
-            <a:off x="960120" y="1645920"/>
-            <a:ext cx="3657600" cy="4023360"/>
+            <a:off x="960120" y="1627632"/>
+            <a:ext cx="3474720" cy="4059936"/>
           </a:xfrm>
           <a:prstGeom prst="rect">
             <a:avLst/>
@@ -3940,13 +4002,13 @@
               </a:spcAft>
               <a:defRPr sz="1700" b="1">
                 <a:solidFill>
-                  <a:srgbClr val="FBBF24"/>
-                </a:solidFill>
-                <a:latin typeface="Arial"/>
-              </a:defRPr>
-            </a:pPr>
-            <a:r>
-              <a:t>Terraform AWS Automation</a:t>
+                  <a:srgbClr val="FACC15"/>
+                </a:solidFill>
+                <a:latin typeface="Arial"/>
+              </a:defRPr>
+            </a:pPr>
+            <a:r>
+              <a:t>Terraform AWS Infrastructure</a:t>
             </a:r>
           </a:p>
           <a:p>
@@ -3956,13 +4018,13 @@
               </a:spcAft>
               <a:defRPr sz="1300">
                 <a:solidFill>
-                  <a:srgbClr val="F8FAFC"/>
-                </a:solidFill>
-                <a:latin typeface="Arial"/>
-              </a:defRPr>
-            </a:pPr>
-            <a:r>
-              <a:t>•  Provisioned in AWS Sydney region (ap-southeast-2).</a:t>
+                  <a:srgbClr val="FFFFFF"/>
+                </a:solidFill>
+                <a:latin typeface="Arial"/>
+              </a:defRPr>
+            </a:pPr>
+            <a:r>
+              <a:t>•  Region: AWS Sydney (ap-southeast-2).</a:t>
             </a:r>
           </a:p>
           <a:p>
@@ -3972,13 +4034,13 @@
               </a:spcAft>
               <a:defRPr sz="1300">
                 <a:solidFill>
-                  <a:srgbClr val="F8FAFC"/>
-                </a:solidFill>
-                <a:latin typeface="Arial"/>
-              </a:defRPr>
-            </a:pPr>
-            <a:r>
-              <a:t>•  Modular Terraform: Created VPC, Subnets, and EKS 1.31 cluster.</a:t>
+                  <a:srgbClr val="FFFFFF"/>
+                </a:solidFill>
+                <a:latin typeface="Arial"/>
+              </a:defRPr>
+            </a:pPr>
+            <a:r>
+              <a:t>•  Modular IaC: Custom VPC, public/private subnets, Internet Gateway.</a:t>
             </a:r>
           </a:p>
           <a:p>
@@ -3988,13 +4050,13 @@
               </a:spcAft>
               <a:defRPr sz="1300">
                 <a:solidFill>
-                  <a:srgbClr val="F8FAFC"/>
-                </a:solidFill>
-                <a:latin typeface="Arial"/>
-              </a:defRPr>
-            </a:pPr>
-            <a:r>
-              <a:t>•  Verified ACTIVE status in AWS Management Console.</a:t>
+                  <a:srgbClr val="FFFFFF"/>
+                </a:solidFill>
+                <a:latin typeface="Arial"/>
+              </a:defRPr>
+            </a:pPr>
+            <a:r>
+              <a:t>•  EKS Cluster: stockpulse-eks-cluster provisioned and verified ACTIVE.</a:t>
             </a:r>
           </a:p>
           <a:p>
@@ -4004,13 +4066,13 @@
               </a:spcAft>
               <a:defRPr sz="1300">
                 <a:solidFill>
-                  <a:srgbClr val="F8FAFC"/>
-                </a:solidFill>
-                <a:latin typeface="Arial"/>
-              </a:defRPr>
-            </a:pPr>
-            <a:r>
-              <a:t>•  Zero-waste teardown: terraform destroy cleanly removed all resources.</a:t>
+                  <a:srgbClr val="FFFFFF"/>
+                </a:solidFill>
+                <a:latin typeface="Arial"/>
+              </a:defRPr>
+            </a:pPr>
+            <a:r>
+              <a:t>•  Strict Cost Control: Cleanly destroyed via terraform destroy to preserve $100 credit.</a:t>
             </a:r>
           </a:p>
         </p:txBody>
@@ -4023,14 +4085,14 @@
         </p:nvSpPr>
         <p:spPr>
           <a:xfrm>
-            <a:off x="5084064" y="1426464"/>
-            <a:ext cx="6382512" cy="4462272"/>
+            <a:off x="4901184" y="1426464"/>
+            <a:ext cx="6565392" cy="2176272"/>
           </a:xfrm>
           <a:prstGeom prst="roundRect">
             <a:avLst/>
           </a:prstGeom>
           <a:solidFill>
-            <a:srgbClr val="334155"/>
+            <a:srgbClr val="2D374B"/>
           </a:solidFill>
           <a:ln>
             <a:noFill/>
@@ -4074,8 +4136,75 @@
         </p:blipFill>
         <p:spPr>
           <a:xfrm>
-            <a:off x="5120640" y="1463040"/>
-            <a:ext cx="6309360" cy="4389120"/>
+            <a:off x="4937760" y="1463040"/>
+            <a:ext cx="6492240" cy="2103120"/>
+          </a:xfrm>
+          <a:prstGeom prst="rect">
+            <a:avLst/>
+          </a:prstGeom>
+        </p:spPr>
+      </p:pic>
+      <p:sp>
+        <p:nvSpPr>
+          <p:cNvPr id="11" name="Rounded Rectangle 10"/>
+          <p:cNvSpPr/>
+          <p:nvPr/>
+        </p:nvSpPr>
+        <p:spPr>
+          <a:xfrm>
+            <a:off x="4901184" y="3712463"/>
+            <a:ext cx="6565392" cy="2176272"/>
+          </a:xfrm>
+          <a:prstGeom prst="roundRect">
+            <a:avLst/>
+          </a:prstGeom>
+          <a:solidFill>
+            <a:srgbClr val="2D374B"/>
+          </a:solidFill>
+          <a:ln>
+            <a:noFill/>
+          </a:ln>
+        </p:spPr>
+        <p:style>
+          <a:lnRef idx="1">
+            <a:schemeClr val="accent1"/>
+          </a:lnRef>
+          <a:fillRef idx="3">
+            <a:schemeClr val="accent1"/>
+          </a:fillRef>
+          <a:effectRef idx="2">
+            <a:schemeClr val="accent1"/>
+          </a:effectRef>
+          <a:fontRef idx="minor">
+            <a:schemeClr val="lt1"/>
+          </a:fontRef>
+        </p:style>
+        <p:txBody>
+          <a:bodyPr rtlCol="0" anchor="ctr"/>
+          <a:lstStyle/>
+          <a:p>
+            <a:pPr algn="ctr"/>
+          </a:p>
+        </p:txBody>
+      </p:sp>
+      <p:pic>
+        <p:nvPicPr>
+          <p:cNvPr id="12" name="Picture 11" descr="aws-vpc-console.png"/>
+          <p:cNvPicPr>
+            <a:picLocks noChangeAspect="1"/>
+          </p:cNvPicPr>
+          <p:nvPr/>
+        </p:nvPicPr>
+        <p:blipFill>
+          <a:blip r:embed="rId3"/>
+          <a:stretch>
+            <a:fillRect/>
+          </a:stretch>
+        </p:blipFill>
+        <p:spPr>
+          <a:xfrm>
+            <a:off x="4937760" y="3749039"/>
+            <a:ext cx="6492240" cy="2103120"/>
           </a:xfrm>
           <a:prstGeom prst="rect">
             <a:avLst/>
@@ -4115,7 +4244,7 @@
             <a:avLst/>
           </a:prstGeom>
           <a:solidFill>
-            <a:srgbClr val="0F172A"/>
+            <a:srgbClr val="0B0F19"/>
           </a:solidFill>
           <a:ln>
             <a:noFill/>
@@ -4151,8 +4280,8 @@
         </p:nvSpPr>
         <p:spPr>
           <a:xfrm>
-            <a:off x="731520" y="365760"/>
-            <a:ext cx="7315200" cy="320040"/>
+            <a:off x="731520" y="320040"/>
+            <a:ext cx="10058400" cy="320040"/>
           </a:xfrm>
           <a:prstGeom prst="rect">
             <a:avLst/>
@@ -4160,7 +4289,7 @@
           <a:noFill/>
         </p:spPr>
         <p:txBody>
-          <a:bodyPr wrap="square">
+          <a:bodyPr wrap="none">
             <a:spAutoFit/>
           </a:bodyPr>
           <a:lstStyle/>
@@ -4187,8 +4316,8 @@
         </p:nvSpPr>
         <p:spPr>
           <a:xfrm>
-            <a:off x="731520" y="640080"/>
-            <a:ext cx="10515600" cy="640080"/>
+            <a:off x="731520" y="621792"/>
+            <a:ext cx="10698480" cy="685800"/>
           </a:xfrm>
           <a:prstGeom prst="rect">
             <a:avLst/>
@@ -4196,7 +4325,7 @@
           <a:noFill/>
         </p:spPr>
         <p:txBody>
-          <a:bodyPr wrap="square">
+          <a:bodyPr wrap="none">
             <a:spAutoFit/>
           </a:bodyPr>
           <a:lstStyle/>
@@ -4204,13 +4333,13 @@
             <a:pPr>
               <a:defRPr sz="2600" b="1">
                 <a:solidFill>
-                  <a:srgbClr val="F8FAFC"/>
-                </a:solidFill>
-                <a:latin typeface="Arial"/>
-              </a:defRPr>
-            </a:pPr>
-            <a:r>
-              <a:t>Application Output: Live Dashboard &amp; REST API</a:t>
+                  <a:srgbClr val="FFFFFF"/>
+                </a:solidFill>
+                <a:latin typeface="Arial"/>
+              </a:defRPr>
+            </a:pPr>
+            <a:r>
+              <a:t>Application Output: Live Dashboard &amp; Responsive Mobile</a:t>
             </a:r>
           </a:p>
         </p:txBody>
@@ -4223,14 +4352,14 @@
         </p:nvSpPr>
         <p:spPr>
           <a:xfrm>
-            <a:off x="731520" y="6309360"/>
+            <a:off x="731520" y="6327648"/>
             <a:ext cx="10728655" cy="18288"/>
           </a:xfrm>
           <a:prstGeom prst="rect">
             <a:avLst/>
           </a:prstGeom>
           <a:solidFill>
-            <a:srgbClr val="334155"/>
+            <a:srgbClr val="2D374B"/>
           </a:solidFill>
           <a:ln>
             <a:noFill/>
@@ -4266,7 +4395,7 @@
         </p:nvSpPr>
         <p:spPr>
           <a:xfrm>
-            <a:off x="731520" y="6355080"/>
+            <a:off x="731520" y="6364224"/>
             <a:ext cx="10728655" cy="320040"/>
           </a:xfrm>
           <a:prstGeom prst="rect">
@@ -4283,7 +4412,7 @@
             <a:pPr>
               <a:defRPr sz="1000">
                 <a:solidFill>
-                  <a:srgbClr val="94A3B8"/>
+                  <a:srgbClr val="9CA3AF"/>
                 </a:solidFill>
                 <a:latin typeface="Arial"/>
               </a:defRPr>
@@ -4303,17 +4432,17 @@
         <p:spPr>
           <a:xfrm>
             <a:off x="731520" y="1463040"/>
-            <a:ext cx="5120640" cy="1463040"/>
+            <a:ext cx="3931920" cy="4389120"/>
           </a:xfrm>
           <a:prstGeom prst="roundRect">
             <a:avLst/>
           </a:prstGeom>
           <a:solidFill>
-            <a:srgbClr val="1E293B"/>
+            <a:srgbClr val="141B2D"/>
           </a:solidFill>
           <a:ln w="19050">
             <a:solidFill>
-              <a:srgbClr val="334155"/>
+              <a:srgbClr val="2D374B"/>
             </a:solidFill>
           </a:ln>
         </p:spPr>
@@ -4347,8 +4476,8 @@
         </p:nvSpPr>
         <p:spPr>
           <a:xfrm>
-            <a:off x="960120" y="1645920"/>
-            <a:ext cx="4663440" cy="1097280"/>
+            <a:off x="960120" y="1627632"/>
+            <a:ext cx="3474720" cy="4059936"/>
           </a:xfrm>
           <a:prstGeom prst="rect">
             <a:avLst/>
@@ -4373,7 +4502,7 @@
               </a:defRPr>
             </a:pPr>
             <a:r>
-              <a:t>Live Web Dashboard (React 18)</a:t>
+              <a:t>Warehouse Operator UX</a:t>
             </a:r>
           </a:p>
           <a:p>
@@ -4383,13 +4512,13 @@
               </a:spcAft>
               <a:defRPr sz="1300">
                 <a:solidFill>
-                  <a:srgbClr val="F8FAFC"/>
-                </a:solidFill>
-                <a:latin typeface="Arial"/>
-              </a:defRPr>
-            </a:pPr>
-            <a:r>
-              <a:t>•  Interactive UI displays inventory items, stock levels, and threshold alerts.</a:t>
+                  <a:srgbClr val="FFFFFF"/>
+                </a:solidFill>
+                <a:latin typeface="Arial"/>
+              </a:defRPr>
+            </a:pPr>
+            <a:r>
+              <a:t>•  Desktop Command Center: Real-time stock levels, SKU lookups, and restocking modal.</a:t>
             </a:r>
           </a:p>
           <a:p>
@@ -4399,13 +4528,29 @@
               </a:spcAft>
               <a:defRPr sz="1300">
                 <a:solidFill>
-                  <a:srgbClr val="F8FAFC"/>
-                </a:solidFill>
-                <a:latin typeface="Arial"/>
-              </a:defRPr>
-            </a:pPr>
-            <a:r>
-              <a:t>•  Operators can restock items or adjust quantities in real time.</a:t>
+                  <a:srgbClr val="FFFFFF"/>
+                </a:solidFill>
+                <a:latin typeface="Arial"/>
+              </a:defRPr>
+            </a:pPr>
+            <a:r>
+              <a:t>•  Visual Badges: Instant color-coded alerts for Low Stock and Critical items.</a:t>
+            </a:r>
+          </a:p>
+          <a:p>
+            <a:pPr>
+              <a:spcAft>
+                <a:spcPts val="600"/>
+              </a:spcAft>
+              <a:defRPr sz="1300">
+                <a:solidFill>
+                  <a:srgbClr val="FFFFFF"/>
+                </a:solidFill>
+                <a:latin typeface="Arial"/>
+              </a:defRPr>
+            </a:pPr>
+            <a:r>
+              <a:t>•  Mobile Ready: Fully responsive down to 375px (iPhone SE) for handheld barcode scanners.</a:t>
             </a:r>
           </a:p>
         </p:txBody>
@@ -4418,14 +4563,14 @@
         </p:nvSpPr>
         <p:spPr>
           <a:xfrm>
-            <a:off x="694944" y="3072384"/>
-            <a:ext cx="5193792" cy="2816352"/>
+            <a:off x="4901184" y="1426464"/>
+            <a:ext cx="4187952" cy="4462272"/>
           </a:xfrm>
           <a:prstGeom prst="roundRect">
             <a:avLst/>
           </a:prstGeom>
           <a:solidFill>
-            <a:srgbClr val="334155"/>
+            <a:srgbClr val="2D374B"/>
           </a:solidFill>
           <a:ln>
             <a:noFill/>
@@ -4469,8 +4614,8 @@
         </p:blipFill>
         <p:spPr>
           <a:xfrm>
-            <a:off x="731520" y="3108960"/>
-            <a:ext cx="5120640" cy="2743200"/>
+            <a:off x="4937760" y="1463040"/>
+            <a:ext cx="4114800" cy="4389120"/>
           </a:xfrm>
           <a:prstGeom prst="rect">
             <a:avLst/>
@@ -4485,19 +4630,17 @@
         </p:nvSpPr>
         <p:spPr>
           <a:xfrm>
-            <a:off x="6217920" y="1463040"/>
-            <a:ext cx="5120640" cy="1463040"/>
+            <a:off x="9198864" y="1426464"/>
+            <a:ext cx="2267712" cy="4462272"/>
           </a:xfrm>
           <a:prstGeom prst="roundRect">
             <a:avLst/>
           </a:prstGeom>
           <a:solidFill>
-            <a:srgbClr val="1E293B"/>
+            <a:srgbClr val="2D374B"/>
           </a:solidFill>
-          <a:ln w="19050">
-            <a:solidFill>
-              <a:srgbClr val="334155"/>
-            </a:solidFill>
+          <a:ln>
+            <a:noFill/>
           </a:ln>
         </p:spPr>
         <p:style>
@@ -4522,123 +4665,9 @@
           </a:p>
         </p:txBody>
       </p:sp>
-      <p:sp>
-        <p:nvSpPr>
-          <p:cNvPr id="12" name="TextBox 11"/>
-          <p:cNvSpPr txBox="1"/>
-          <p:nvPr/>
-        </p:nvSpPr>
-        <p:spPr>
-          <a:xfrm>
-            <a:off x="6446520" y="1645920"/>
-            <a:ext cx="4663440" cy="1097280"/>
-          </a:xfrm>
-          <a:prstGeom prst="rect">
-            <a:avLst/>
-          </a:prstGeom>
-          <a:noFill/>
-        </p:spPr>
-        <p:txBody>
-          <a:bodyPr wrap="square">
-            <a:spAutoFit/>
-          </a:bodyPr>
-          <a:lstStyle/>
-          <a:p>
-            <a:pPr>
-              <a:spcAft>
-                <a:spcPts val="800"/>
-              </a:spcAft>
-              <a:defRPr sz="1700" b="1">
-                <a:solidFill>
-                  <a:srgbClr val="34D399"/>
-                </a:solidFill>
-                <a:latin typeface="Arial"/>
-              </a:defRPr>
-            </a:pPr>
-            <a:r>
-              <a:t>Interactive API Documentation (Swagger)</a:t>
-            </a:r>
-          </a:p>
-          <a:p>
-            <a:pPr>
-              <a:spcAft>
-                <a:spcPts val="600"/>
-              </a:spcAft>
-              <a:defRPr sz="1300">
-                <a:solidFill>
-                  <a:srgbClr val="F8FAFC"/>
-                </a:solidFill>
-                <a:latin typeface="Arial"/>
-              </a:defRPr>
-            </a:pPr>
-            <a:r>
-              <a:t>•  OpenAPI /docs endpoint provides live testing for warehouse REST endpoints.</a:t>
-            </a:r>
-          </a:p>
-          <a:p>
-            <a:pPr>
-              <a:spcAft>
-                <a:spcPts val="600"/>
-              </a:spcAft>
-              <a:defRPr sz="1300">
-                <a:solidFill>
-                  <a:srgbClr val="F8FAFC"/>
-                </a:solidFill>
-                <a:latin typeface="Arial"/>
-              </a:defRPr>
-            </a:pPr>
-            <a:r>
-              <a:t>•  Strict Pydantic schemas enforce valid warehouse data entry.</a:t>
-            </a:r>
-          </a:p>
-        </p:txBody>
-      </p:sp>
-      <p:sp>
-        <p:nvSpPr>
-          <p:cNvPr id="13" name="Rounded Rectangle 12"/>
-          <p:cNvSpPr/>
-          <p:nvPr/>
-        </p:nvSpPr>
-        <p:spPr>
-          <a:xfrm>
-            <a:off x="6181344" y="3072384"/>
-            <a:ext cx="5193792" cy="2816352"/>
-          </a:xfrm>
-          <a:prstGeom prst="roundRect">
-            <a:avLst/>
-          </a:prstGeom>
-          <a:solidFill>
-            <a:srgbClr val="334155"/>
-          </a:solidFill>
-          <a:ln>
-            <a:noFill/>
-          </a:ln>
-        </p:spPr>
-        <p:style>
-          <a:lnRef idx="1">
-            <a:schemeClr val="accent1"/>
-          </a:lnRef>
-          <a:fillRef idx="3">
-            <a:schemeClr val="accent1"/>
-          </a:fillRef>
-          <a:effectRef idx="2">
-            <a:schemeClr val="accent1"/>
-          </a:effectRef>
-          <a:fontRef idx="minor">
-            <a:schemeClr val="lt1"/>
-          </a:fontRef>
-        </p:style>
-        <p:txBody>
-          <a:bodyPr rtlCol="0" anchor="ctr"/>
-          <a:lstStyle/>
-          <a:p>
-            <a:pPr algn="ctr"/>
-          </a:p>
-        </p:txBody>
-      </p:sp>
       <p:pic>
         <p:nvPicPr>
-          <p:cNvPr id="14" name="Picture 13" descr="api-docs-swagger.png"/>
+          <p:cNvPr id="12" name="Picture 11" descr="m1-mobile-view.png"/>
           <p:cNvPicPr>
             <a:picLocks noChangeAspect="1"/>
           </p:cNvPicPr>
@@ -4652,8 +4681,8 @@
         </p:blipFill>
         <p:spPr>
           <a:xfrm>
-            <a:off x="6217920" y="3108960"/>
-            <a:ext cx="5120640" cy="2743200"/>
+            <a:off x="9235440" y="1463040"/>
+            <a:ext cx="2194560" cy="4389120"/>
           </a:xfrm>
           <a:prstGeom prst="rect">
             <a:avLst/>
@@ -4693,7 +4722,7 @@
             <a:avLst/>
           </a:prstGeom>
           <a:solidFill>
-            <a:srgbClr val="0F172A"/>
+            <a:srgbClr val="0B0F19"/>
           </a:solidFill>
           <a:ln>
             <a:noFill/>
@@ -4729,8 +4758,8 @@
         </p:nvSpPr>
         <p:spPr>
           <a:xfrm>
-            <a:off x="731520" y="365760"/>
-            <a:ext cx="7315200" cy="320040"/>
+            <a:off x="731520" y="320040"/>
+            <a:ext cx="10058400" cy="320040"/>
           </a:xfrm>
           <a:prstGeom prst="rect">
             <a:avLst/>
@@ -4738,7 +4767,7 @@
           <a:noFill/>
         </p:spPr>
         <p:txBody>
-          <a:bodyPr wrap="square">
+          <a:bodyPr wrap="none">
             <a:spAutoFit/>
           </a:bodyPr>
           <a:lstStyle/>
@@ -4765,8 +4794,8 @@
         </p:nvSpPr>
         <p:spPr>
           <a:xfrm>
-            <a:off x="731520" y="640080"/>
-            <a:ext cx="10515600" cy="640080"/>
+            <a:off x="731520" y="621792"/>
+            <a:ext cx="10698480" cy="685800"/>
           </a:xfrm>
           <a:prstGeom prst="rect">
             <a:avLst/>
@@ -4774,7 +4803,7 @@
           <a:noFill/>
         </p:spPr>
         <p:txBody>
-          <a:bodyPr wrap="square">
+          <a:bodyPr wrap="none">
             <a:spAutoFit/>
           </a:bodyPr>
           <a:lstStyle/>
@@ -4782,13 +4811,13 @@
             <a:pPr>
               <a:defRPr sz="2600" b="1">
                 <a:solidFill>
-                  <a:srgbClr val="F8FAFC"/>
-                </a:solidFill>
-                <a:latin typeface="Arial"/>
-              </a:defRPr>
-            </a:pPr>
-            <a:r>
-              <a:t>Observability: Prometheus Telemetry &amp; Health Probes</a:t>
+                  <a:srgbClr val="FFFFFF"/>
+                </a:solidFill>
+                <a:latin typeface="Arial"/>
+              </a:defRPr>
+            </a:pPr>
+            <a:r>
+              <a:t>Observability: Prometheus Telemetry &amp; Probes</a:t>
             </a:r>
           </a:p>
         </p:txBody>
@@ -4801,14 +4830,14 @@
         </p:nvSpPr>
         <p:spPr>
           <a:xfrm>
-            <a:off x="731520" y="6309360"/>
+            <a:off x="731520" y="6327648"/>
             <a:ext cx="10728655" cy="18288"/>
           </a:xfrm>
           <a:prstGeom prst="rect">
             <a:avLst/>
           </a:prstGeom>
           <a:solidFill>
-            <a:srgbClr val="334155"/>
+            <a:srgbClr val="2D374B"/>
           </a:solidFill>
           <a:ln>
             <a:noFill/>
@@ -4844,7 +4873,7 @@
         </p:nvSpPr>
         <p:spPr>
           <a:xfrm>
-            <a:off x="731520" y="6355080"/>
+            <a:off x="731520" y="6364224"/>
             <a:ext cx="10728655" cy="320040"/>
           </a:xfrm>
           <a:prstGeom prst="rect">
@@ -4861,7 +4890,7 @@
             <a:pPr>
               <a:defRPr sz="1000">
                 <a:solidFill>
-                  <a:srgbClr val="94A3B8"/>
+                  <a:srgbClr val="9CA3AF"/>
                 </a:solidFill>
                 <a:latin typeface="Arial"/>
               </a:defRPr>
@@ -4881,17 +4910,17 @@
         <p:spPr>
           <a:xfrm>
             <a:off x="731520" y="1463040"/>
-            <a:ext cx="4114800" cy="4389120"/>
+            <a:ext cx="3931920" cy="4389120"/>
           </a:xfrm>
           <a:prstGeom prst="roundRect">
             <a:avLst/>
           </a:prstGeom>
           <a:solidFill>
-            <a:srgbClr val="1E293B"/>
+            <a:srgbClr val="141B2D"/>
           </a:solidFill>
           <a:ln w="19050">
             <a:solidFill>
-              <a:srgbClr val="334155"/>
+              <a:srgbClr val="2D374B"/>
             </a:solidFill>
           </a:ln>
         </p:spPr>
@@ -4925,8 +4954,8 @@
         </p:nvSpPr>
         <p:spPr>
           <a:xfrm>
-            <a:off x="960120" y="1645920"/>
-            <a:ext cx="3657600" cy="4023360"/>
+            <a:off x="960120" y="1627632"/>
+            <a:ext cx="3474720" cy="4059936"/>
           </a:xfrm>
           <a:prstGeom prst="rect">
             <a:avLst/>
@@ -4945,13 +4974,13 @@
               </a:spcAft>
               <a:defRPr sz="1700" b="1">
                 <a:solidFill>
-                  <a:srgbClr val="38BDF8"/>
-                </a:solidFill>
-                <a:latin typeface="Arial"/>
-              </a:defRPr>
-            </a:pPr>
-            <a:r>
-              <a:t>Real-Time Metrics &amp; Telemetry</a:t>
+                  <a:srgbClr val="34D399"/>
+                </a:solidFill>
+                <a:latin typeface="Arial"/>
+              </a:defRPr>
+            </a:pPr>
+            <a:r>
+              <a:t>System Telemetry &amp; Health</a:t>
             </a:r>
           </a:p>
           <a:p>
@@ -4961,13 +4990,13 @@
               </a:spcAft>
               <a:defRPr sz="1300">
                 <a:solidFill>
-                  <a:srgbClr val="F8FAFC"/>
-                </a:solidFill>
-                <a:latin typeface="Arial"/>
-              </a:defRPr>
-            </a:pPr>
-            <a:r>
-              <a:t>•  Prometheus /metrics endpoint exposes request counts and latency.</a:t>
+                  <a:srgbClr val="FFFFFF"/>
+                </a:solidFill>
+                <a:latin typeface="Arial"/>
+              </a:defRPr>
+            </a:pPr>
+            <a:r>
+              <a:t>•  Prometheus /metrics endpoint exposes live request rates, latency, and status codes.</a:t>
             </a:r>
           </a:p>
           <a:p>
@@ -4977,13 +5006,13 @@
               </a:spcAft>
               <a:defRPr sz="1300">
                 <a:solidFill>
-                  <a:srgbClr val="F8FAFC"/>
-                </a:solidFill>
-                <a:latin typeface="Arial"/>
-              </a:defRPr>
-            </a:pPr>
-            <a:r>
-              <a:t>•  Active /health endpoint monitors database connectivity.</a:t>
+                  <a:srgbClr val="FFFFFF"/>
+                </a:solidFill>
+                <a:latin typeface="Arial"/>
+              </a:defRPr>
+            </a:pPr>
+            <a:r>
+              <a:t>•  Liveness Probe (/health): Actively verifies database connection and app uptime.</a:t>
             </a:r>
           </a:p>
           <a:p>
@@ -4993,29 +5022,13 @@
               </a:spcAft>
               <a:defRPr sz="1300">
                 <a:solidFill>
-                  <a:srgbClr val="F8FAFC"/>
-                </a:solidFill>
-                <a:latin typeface="Arial"/>
-              </a:defRPr>
-            </a:pPr>
-            <a:r>
-              <a:t>•  Enables rapid diagnosis and automated alert triggering.</a:t>
-            </a:r>
-          </a:p>
-          <a:p>
-            <a:pPr>
-              <a:spcAft>
-                <a:spcPts val="600"/>
-              </a:spcAft>
-              <a:defRPr sz="1300">
-                <a:solidFill>
-                  <a:srgbClr val="F8FAFC"/>
-                </a:solidFill>
-                <a:latin typeface="Arial"/>
-              </a:defRPr>
-            </a:pPr>
-            <a:r>
-              <a:t>•  Grafana dashboards configured to track warehouse throughput.</a:t>
+                  <a:srgbClr val="FFFFFF"/>
+                </a:solidFill>
+                <a:latin typeface="Arial"/>
+              </a:defRPr>
+            </a:pPr>
+            <a:r>
+              <a:t>•  Grafana Dashboards: Visual panels configured to monitor RPS and cluster resources.</a:t>
             </a:r>
           </a:p>
         </p:txBody>
@@ -5028,14 +5041,14 @@
         </p:nvSpPr>
         <p:spPr>
           <a:xfrm>
-            <a:off x="5084064" y="1426464"/>
-            <a:ext cx="6382512" cy="4462272"/>
+            <a:off x="4901184" y="1426464"/>
+            <a:ext cx="6565392" cy="4462272"/>
           </a:xfrm>
           <a:prstGeom prst="roundRect">
             <a:avLst/>
           </a:prstGeom>
           <a:solidFill>
-            <a:srgbClr val="334155"/>
+            <a:srgbClr val="2D374B"/>
           </a:solidFill>
           <a:ln>
             <a:noFill/>
@@ -5065,7 +5078,7 @@
       </p:sp>
       <p:pic>
         <p:nvPicPr>
-          <p:cNvPr id="10" name="Picture 9" descr="api-metrics.png"/>
+          <p:cNvPr id="10" name="Picture 9" descr="m9-metrics-curl.png"/>
           <p:cNvPicPr>
             <a:picLocks noChangeAspect="1"/>
           </p:cNvPicPr>
@@ -5079,8 +5092,8 @@
         </p:blipFill>
         <p:spPr>
           <a:xfrm>
-            <a:off x="5120640" y="1463040"/>
-            <a:ext cx="6309360" cy="4389120"/>
+            <a:off x="4937760" y="1463040"/>
+            <a:ext cx="6492240" cy="4389120"/>
           </a:xfrm>
           <a:prstGeom prst="rect">
             <a:avLst/>
@@ -5120,7 +5133,7 @@
             <a:avLst/>
           </a:prstGeom>
           <a:solidFill>
-            <a:srgbClr val="0F172A"/>
+            <a:srgbClr val="0B0F19"/>
           </a:solidFill>
           <a:ln>
             <a:noFill/>
@@ -5156,8 +5169,8 @@
         </p:nvSpPr>
         <p:spPr>
           <a:xfrm>
-            <a:off x="731520" y="365760"/>
-            <a:ext cx="7315200" cy="320040"/>
+            <a:off x="731520" y="320040"/>
+            <a:ext cx="10058400" cy="320040"/>
           </a:xfrm>
           <a:prstGeom prst="rect">
             <a:avLst/>
@@ -5165,7 +5178,7 @@
           <a:noFill/>
         </p:spPr>
         <p:txBody>
-          <a:bodyPr wrap="square">
+          <a:bodyPr wrap="none">
             <a:spAutoFit/>
           </a:bodyPr>
           <a:lstStyle/>
@@ -5179,7 +5192,7 @@
               </a:defRPr>
             </a:pPr>
             <a:r>
-              <a:t>13. GRADING RUBRIC PARITY</a:t>
+              <a:t>13. FAILURE DIAGNOSIS &amp; RECOVERY</a:t>
             </a:r>
           </a:p>
         </p:txBody>
@@ -5192,8 +5205,8 @@
         </p:nvSpPr>
         <p:spPr>
           <a:xfrm>
-            <a:off x="731520" y="640080"/>
-            <a:ext cx="10515600" cy="640080"/>
+            <a:off x="731520" y="621792"/>
+            <a:ext cx="10698480" cy="685800"/>
           </a:xfrm>
           <a:prstGeom prst="rect">
             <a:avLst/>
@@ -5201,7 +5214,7 @@
           <a:noFill/>
         </p:spPr>
         <p:txBody>
-          <a:bodyPr wrap="square">
+          <a:bodyPr wrap="none">
             <a:spAutoFit/>
           </a:bodyPr>
           <a:lstStyle/>
@@ -5209,13 +5222,13 @@
             <a:pPr>
               <a:defRPr sz="2600" b="1">
                 <a:solidFill>
-                  <a:srgbClr val="F8FAFC"/>
-                </a:solidFill>
-                <a:latin typeface="Arial"/>
-              </a:defRPr>
-            </a:pPr>
-            <a:r>
-              <a:t>Project Summary: Complete Rubric Alignment</a:t>
+                  <a:srgbClr val="FFFFFF"/>
+                </a:solidFill>
+                <a:latin typeface="Arial"/>
+              </a:defRPr>
+            </a:pPr>
+            <a:r>
+              <a:t>Troubleshooting &amp; Resilience: Chaos Engineering Lab</a:t>
             </a:r>
           </a:p>
         </p:txBody>
@@ -5228,14 +5241,14 @@
         </p:nvSpPr>
         <p:spPr>
           <a:xfrm>
-            <a:off x="731520" y="6309360"/>
+            <a:off x="731520" y="6327648"/>
             <a:ext cx="10728655" cy="18288"/>
           </a:xfrm>
           <a:prstGeom prst="rect">
             <a:avLst/>
           </a:prstGeom>
           <a:solidFill>
-            <a:srgbClr val="334155"/>
+            <a:srgbClr val="2D374B"/>
           </a:solidFill>
           <a:ln>
             <a:noFill/>
@@ -5271,7 +5284,7 @@
         </p:nvSpPr>
         <p:spPr>
           <a:xfrm>
-            <a:off x="731520" y="6355080"/>
+            <a:off x="731520" y="6364224"/>
             <a:ext cx="10728655" cy="320040"/>
           </a:xfrm>
           <a:prstGeom prst="rect">
@@ -5288,7 +5301,7 @@
             <a:pPr>
               <a:defRPr sz="1000">
                 <a:solidFill>
-                  <a:srgbClr val="94A3B8"/>
+                  <a:srgbClr val="9CA3AF"/>
                 </a:solidFill>
                 <a:latin typeface="Arial"/>
               </a:defRPr>
@@ -5308,17 +5321,17 @@
         <p:spPr>
           <a:xfrm>
             <a:off x="731520" y="1463040"/>
-            <a:ext cx="2468880" cy="4389120"/>
+            <a:ext cx="3931920" cy="4389120"/>
           </a:xfrm>
           <a:prstGeom prst="roundRect">
             <a:avLst/>
           </a:prstGeom>
           <a:solidFill>
-            <a:srgbClr val="1E293B"/>
+            <a:srgbClr val="141B2D"/>
           </a:solidFill>
           <a:ln w="19050">
             <a:solidFill>
-              <a:srgbClr val="334155"/>
+              <a:srgbClr val="2D374B"/>
             </a:solidFill>
           </a:ln>
         </p:spPr>
@@ -5352,8 +5365,8 @@
         </p:nvSpPr>
         <p:spPr>
           <a:xfrm>
-            <a:off x="960120" y="1645920"/>
-            <a:ext cx="2011680" cy="4023360"/>
+            <a:off x="960120" y="1627632"/>
+            <a:ext cx="3474720" cy="4059936"/>
           </a:xfrm>
           <a:prstGeom prst="rect">
             <a:avLst/>
@@ -5372,13 +5385,13 @@
               </a:spcAft>
               <a:defRPr sz="1700" b="1">
                 <a:solidFill>
-                  <a:srgbClr val="34D399"/>
-                </a:solidFill>
-                <a:latin typeface="Arial"/>
-              </a:defRPr>
-            </a:pPr>
-            <a:r>
-              <a:t>100% Tests Pass</a:t>
+                  <a:srgbClr val="FACC15"/>
+                </a:solidFill>
+                <a:latin typeface="Arial"/>
+              </a:defRPr>
+            </a:pPr>
+            <a:r>
+              <a:t>Production Failure Runbook</a:t>
             </a:r>
           </a:p>
           <a:p>
@@ -5388,13 +5401,13 @@
               </a:spcAft>
               <a:defRPr sz="1300">
                 <a:solidFill>
-                  <a:srgbClr val="F8FAFC"/>
-                </a:solidFill>
-                <a:latin typeface="Arial"/>
-              </a:defRPr>
-            </a:pPr>
-            <a:r>
-              <a:t>•  11 Pytest tests pass.</a:t>
+                  <a:srgbClr val="FFFFFF"/>
+                </a:solidFill>
+                <a:latin typeface="Arial"/>
+              </a:defRPr>
+            </a:pPr>
+            <a:r>
+              <a:t>•  Scenario: Broken image tag injected via troubleshooting/broken-image.yaml.</a:t>
             </a:r>
           </a:p>
           <a:p>
@@ -5404,13 +5417,13 @@
               </a:spcAft>
               <a:defRPr sz="1300">
                 <a:solidFill>
-                  <a:srgbClr val="F8FAFC"/>
-                </a:solidFill>
-                <a:latin typeface="Arial"/>
-              </a:defRPr>
-            </a:pPr>
-            <a:r>
-              <a:t>•  Validates models &amp; routes.</a:t>
+                  <a:srgbClr val="FFFFFF"/>
+                </a:solidFill>
+                <a:latin typeface="Arial"/>
+              </a:defRPr>
+            </a:pPr>
+            <a:r>
+              <a:t>•  Diagnostic: kubectl describe pod identifies ImagePullBackOff and root-cause event.</a:t>
             </a:r>
           </a:p>
           <a:p>
@@ -5420,13 +5433,13 @@
               </a:spcAft>
               <a:defRPr sz="1300">
                 <a:solidFill>
-                  <a:srgbClr val="F8FAFC"/>
-                </a:solidFill>
-                <a:latin typeface="Arial"/>
-              </a:defRPr>
-            </a:pPr>
-            <a:r>
-              <a:t>•  0.12s test runtime.</a:t>
+                  <a:srgbClr val="FFFFFF"/>
+                </a:solidFill>
+                <a:latin typeface="Arial"/>
+              </a:defRPr>
+            </a:pPr>
+            <a:r>
+              <a:t>•  Resilience: Existing pods continue serving traffic with zero service disruption.</a:t>
             </a:r>
           </a:p>
           <a:p>
@@ -5436,13 +5449,13 @@
               </a:spcAft>
               <a:defRPr sz="1300">
                 <a:solidFill>
-                  <a:srgbClr val="F8FAFC"/>
-                </a:solidFill>
-                <a:latin typeface="Arial"/>
-              </a:defRPr>
-            </a:pPr>
-            <a:r>
-              <a:t>•  Automatic CI execution.</a:t>
+                  <a:srgbClr val="FFFFFF"/>
+                </a:solidFill>
+                <a:latin typeface="Arial"/>
+              </a:defRPr>
+            </a:pPr>
+            <a:r>
+              <a:t>•  Proven playbook for rapid incident resolution in high-stakes environments.</a:t>
             </a:r>
           </a:p>
         </p:txBody>
@@ -5455,19 +5468,17 @@
         </p:nvSpPr>
         <p:spPr>
           <a:xfrm>
-            <a:off x="3429000" y="1463040"/>
-            <a:ext cx="2468880" cy="4389120"/>
+            <a:off x="4901184" y="1426464"/>
+            <a:ext cx="6565392" cy="4462272"/>
           </a:xfrm>
           <a:prstGeom prst="roundRect">
             <a:avLst/>
           </a:prstGeom>
           <a:solidFill>
-            <a:srgbClr val="1E293B"/>
+            <a:srgbClr val="2D374B"/>
           </a:solidFill>
-          <a:ln w="19050">
-            <a:solidFill>
-              <a:srgbClr val="334155"/>
-            </a:solidFill>
+          <a:ln>
+            <a:noFill/>
           </a:ln>
         </p:spPr>
         <p:style>
@@ -5492,130 +5503,67 @@
           </a:p>
         </p:txBody>
       </p:sp>
-      <p:sp>
-        <p:nvSpPr>
-          <p:cNvPr id="10" name="TextBox 9"/>
-          <p:cNvSpPr txBox="1"/>
-          <p:nvPr/>
-        </p:nvSpPr>
-        <p:spPr>
-          <a:xfrm>
-            <a:off x="3657600" y="1645920"/>
-            <a:ext cx="2011680" cy="4023360"/>
-          </a:xfrm>
-          <a:prstGeom prst="rect">
-            <a:avLst/>
-          </a:prstGeom>
-          <a:noFill/>
-        </p:spPr>
-        <p:txBody>
-          <a:bodyPr wrap="square">
-            <a:spAutoFit/>
-          </a:bodyPr>
-          <a:lstStyle/>
-          <a:p>
-            <a:pPr>
-              <a:spcAft>
-                <a:spcPts val="800"/>
-              </a:spcAft>
-              <a:defRPr sz="1700" b="1">
-                <a:solidFill>
-                  <a:srgbClr val="38BDF8"/>
-                </a:solidFill>
-                <a:latin typeface="Arial"/>
-              </a:defRPr>
-            </a:pPr>
-            <a:r>
-              <a:t>Zero-Friction Ops</a:t>
-            </a:r>
-          </a:p>
-          <a:p>
-            <a:pPr>
-              <a:spcAft>
-                <a:spcPts val="600"/>
-              </a:spcAft>
-              <a:defRPr sz="1300">
-                <a:solidFill>
-                  <a:srgbClr val="F8FAFC"/>
-                </a:solidFill>
-                <a:latin typeface="Arial"/>
-              </a:defRPr>
-            </a:pPr>
-            <a:r>
-              <a:t>•  Docker Compose one-click.</a:t>
-            </a:r>
-          </a:p>
-          <a:p>
-            <a:pPr>
-              <a:spcAft>
-                <a:spcPts val="600"/>
-              </a:spcAft>
-              <a:defRPr sz="1300">
-                <a:solidFill>
-                  <a:srgbClr val="F8FAFC"/>
-                </a:solidFill>
-                <a:latin typeface="Arial"/>
-              </a:defRPr>
-            </a:pPr>
-            <a:r>
-              <a:t>•  Kubernetes Helm package.</a:t>
-            </a:r>
-          </a:p>
-          <a:p>
-            <a:pPr>
-              <a:spcAft>
-                <a:spcPts val="600"/>
-              </a:spcAft>
-              <a:defRPr sz="1300">
-                <a:solidFill>
-                  <a:srgbClr val="F8FAFC"/>
-                </a:solidFill>
-                <a:latin typeface="Arial"/>
-              </a:defRPr>
-            </a:pPr>
-            <a:r>
-              <a:t>•  Non-root security standard.</a:t>
-            </a:r>
-          </a:p>
-          <a:p>
-            <a:pPr>
-              <a:spcAft>
-                <a:spcPts val="600"/>
-              </a:spcAft>
-              <a:defRPr sz="1300">
-                <a:solidFill>
-                  <a:srgbClr val="F8FAFC"/>
-                </a:solidFill>
-                <a:latin typeface="Arial"/>
-              </a:defRPr>
-            </a:pPr>
-            <a:r>
-              <a:t>•  ACID database storage.</a:t>
-            </a:r>
-          </a:p>
-        </p:txBody>
-      </p:sp>
-      <p:sp>
-        <p:nvSpPr>
-          <p:cNvPr id="11" name="Rounded Rectangle 10"/>
+      <p:pic>
+        <p:nvPicPr>
+          <p:cNvPr id="10" name="Picture 9" descr="m9-troubleshooting.png"/>
+          <p:cNvPicPr>
+            <a:picLocks noChangeAspect="1"/>
+          </p:cNvPicPr>
+          <p:nvPr/>
+        </p:nvPicPr>
+        <p:blipFill>
+          <a:blip r:embed="rId2"/>
+          <a:stretch>
+            <a:fillRect/>
+          </a:stretch>
+        </p:blipFill>
+        <p:spPr>
+          <a:xfrm>
+            <a:off x="4937760" y="1463040"/>
+            <a:ext cx="6492240" cy="4389120"/>
+          </a:xfrm>
+          <a:prstGeom prst="rect">
+            <a:avLst/>
+          </a:prstGeom>
+        </p:spPr>
+      </p:pic>
+    </p:spTree>
+  </p:cSld>
+  <p:clrMapOvr>
+    <a:masterClrMapping/>
+  </p:clrMapOvr>
+</p:sld>
+</file>
+
+<file path=ppt/slides/slide15.xml><?xml version="1.0" encoding="utf-8"?>
+<p:sld xmlns:a="http://schemas.openxmlformats.org/drawingml/2006/main" xmlns:p="http://schemas.openxmlformats.org/presentationml/2006/main" xmlns:r="http://schemas.openxmlformats.org/officeDocument/2006/relationships">
+  <p:cSld>
+    <p:spTree>
+      <p:nvGrpSpPr>
+        <p:cNvPr id="1" name=""/>
+        <p:cNvGrpSpPr/>
+        <p:nvPr/>
+      </p:nvGrpSpPr>
+      <p:grpSpPr/>
+      <p:sp>
+        <p:nvSpPr>
+          <p:cNvPr id="2" name="Rectangle 1"/>
           <p:cNvSpPr/>
           <p:nvPr/>
         </p:nvSpPr>
         <p:spPr>
           <a:xfrm>
-            <a:off x="6126480" y="1463040"/>
-            <a:ext cx="2468880" cy="4389120"/>
-          </a:xfrm>
-          <a:prstGeom prst="roundRect">
+            <a:off x="0" y="0"/>
+            <a:ext cx="12191695" cy="6858000"/>
+          </a:xfrm>
+          <a:prstGeom prst="rect">
             <a:avLst/>
           </a:prstGeom>
           <a:solidFill>
-            <a:srgbClr val="1E293B"/>
+            <a:srgbClr val="0B0F19"/>
           </a:solidFill>
-          <a:ln w="19050">
-            <a:solidFill>
-              <a:srgbClr val="334155"/>
-            </a:solidFill>
+          <a:ln>
+            <a:noFill/>
           </a:ln>
         </p:spPr>
         <p:style>
@@ -5642,14 +5590,14 @@
       </p:sp>
       <p:sp>
         <p:nvSpPr>
-          <p:cNvPr id="12" name="TextBox 11"/>
+          <p:cNvPr id="3" name="TextBox 2"/>
           <p:cNvSpPr txBox="1"/>
           <p:nvPr/>
         </p:nvSpPr>
         <p:spPr>
           <a:xfrm>
-            <a:off x="6355080" y="1645920"/>
-            <a:ext cx="2011680" cy="4023360"/>
+            <a:off x="731520" y="320040"/>
+            <a:ext cx="10058400" cy="320040"/>
           </a:xfrm>
           <a:prstGeom prst="rect">
             <a:avLst/>
@@ -5657,113 +5605,80 @@
           <a:noFill/>
         </p:spPr>
         <p:txBody>
-          <a:bodyPr wrap="square">
+          <a:bodyPr wrap="none">
             <a:spAutoFit/>
           </a:bodyPr>
           <a:lstStyle/>
           <a:p>
             <a:pPr>
-              <a:spcAft>
-                <a:spcPts val="800"/>
-              </a:spcAft>
-              <a:defRPr sz="1700" b="1">
-                <a:solidFill>
-                  <a:srgbClr val="FBBF24"/>
-                </a:solidFill>
-                <a:latin typeface="Arial"/>
-              </a:defRPr>
-            </a:pPr>
-            <a:r>
-              <a:t>Full DevSecOps</a:t>
-            </a:r>
-          </a:p>
-          <a:p>
-            <a:pPr>
-              <a:spcAft>
-                <a:spcPts val="600"/>
-              </a:spcAft>
-              <a:defRPr sz="1300">
-                <a:solidFill>
-                  <a:srgbClr val="F8FAFC"/>
-                </a:solidFill>
-                <a:latin typeface="Arial"/>
-              </a:defRPr>
-            </a:pPr>
-            <a:r>
-              <a:t>•  5-stage GitHub Actions.</a:t>
-            </a:r>
-          </a:p>
-          <a:p>
-            <a:pPr>
-              <a:spcAft>
-                <a:spcPts val="600"/>
-              </a:spcAft>
-              <a:defRPr sz="1300">
-                <a:solidFill>
-                  <a:srgbClr val="F8FAFC"/>
-                </a:solidFill>
-                <a:latin typeface="Arial"/>
-              </a:defRPr>
-            </a:pPr>
-            <a:r>
-              <a:t>•  Trivy vulnerability scan.</a:t>
-            </a:r>
-          </a:p>
-          <a:p>
-            <a:pPr>
-              <a:spcAft>
-                <a:spcPts val="600"/>
-              </a:spcAft>
-              <a:defRPr sz="1300">
-                <a:solidFill>
-                  <a:srgbClr val="F8FAFC"/>
-                </a:solidFill>
-                <a:latin typeface="Arial"/>
-              </a:defRPr>
-            </a:pPr>
-            <a:r>
-              <a:t>•  GHCR container publishing.</a:t>
-            </a:r>
-          </a:p>
-          <a:p>
-            <a:pPr>
-              <a:spcAft>
-                <a:spcPts val="600"/>
-              </a:spcAft>
-              <a:defRPr sz="1300">
-                <a:solidFill>
-                  <a:srgbClr val="F8FAFC"/>
-                </a:solidFill>
-                <a:latin typeface="Arial"/>
-              </a:defRPr>
-            </a:pPr>
-            <a:r>
-              <a:t>•  Terraform AWS provisioned.</a:t>
-            </a:r>
-          </a:p>
-        </p:txBody>
-      </p:sp>
-      <p:sp>
-        <p:nvSpPr>
-          <p:cNvPr id="13" name="Rounded Rectangle 12"/>
+              <a:defRPr sz="1100" b="1">
+                <a:solidFill>
+                  <a:srgbClr val="38BDF8"/>
+                </a:solidFill>
+                <a:latin typeface="Arial"/>
+              </a:defRPr>
+            </a:pPr>
+            <a:r>
+              <a:t>14. GRADING SCORECARD</a:t>
+            </a:r>
+          </a:p>
+        </p:txBody>
+      </p:sp>
+      <p:sp>
+        <p:nvSpPr>
+          <p:cNvPr id="4" name="TextBox 3"/>
+          <p:cNvSpPr txBox="1"/>
+          <p:nvPr/>
+        </p:nvSpPr>
+        <p:spPr>
+          <a:xfrm>
+            <a:off x="731520" y="621792"/>
+            <a:ext cx="10698480" cy="685800"/>
+          </a:xfrm>
+          <a:prstGeom prst="rect">
+            <a:avLst/>
+          </a:prstGeom>
+          <a:noFill/>
+        </p:spPr>
+        <p:txBody>
+          <a:bodyPr wrap="none">
+            <a:spAutoFit/>
+          </a:bodyPr>
+          <a:lstStyle/>
+          <a:p>
+            <a:pPr>
+              <a:defRPr sz="2600" b="1">
+                <a:solidFill>
+                  <a:srgbClr val="FFFFFF"/>
+                </a:solidFill>
+                <a:latin typeface="Arial"/>
+              </a:defRPr>
+            </a:pPr>
+            <a:r>
+              <a:t>Project Summary: Complete 10-Module Rubric Parity</a:t>
+            </a:r>
+          </a:p>
+        </p:txBody>
+      </p:sp>
+      <p:sp>
+        <p:nvSpPr>
+          <p:cNvPr id="5" name="Rectangle 4"/>
           <p:cNvSpPr/>
           <p:nvPr/>
         </p:nvSpPr>
         <p:spPr>
           <a:xfrm>
-            <a:off x="8823960" y="1463040"/>
-            <a:ext cx="2468880" cy="4389120"/>
-          </a:xfrm>
-          <a:prstGeom prst="roundRect">
+            <a:off x="731520" y="6327648"/>
+            <a:ext cx="10728655" cy="18288"/>
+          </a:xfrm>
+          <a:prstGeom prst="rect">
             <a:avLst/>
           </a:prstGeom>
           <a:solidFill>
-            <a:srgbClr val="1E293B"/>
+            <a:srgbClr val="2D374B"/>
           </a:solidFill>
-          <a:ln w="19050">
-            <a:solidFill>
-              <a:srgbClr val="334155"/>
-            </a:solidFill>
+          <a:ln>
+            <a:noFill/>
           </a:ln>
         </p:spPr>
         <p:style>
@@ -5790,14 +5705,95 @@
       </p:sp>
       <p:sp>
         <p:nvSpPr>
-          <p:cNvPr id="14" name="TextBox 13"/>
+          <p:cNvPr id="6" name="TextBox 5"/>
           <p:cNvSpPr txBox="1"/>
           <p:nvPr/>
         </p:nvSpPr>
         <p:spPr>
           <a:xfrm>
-            <a:off x="9052560" y="1645920"/>
-            <a:ext cx="2011680" cy="4023360"/>
+            <a:off x="731520" y="6364224"/>
+            <a:ext cx="10728655" cy="320040"/>
+          </a:xfrm>
+          <a:prstGeom prst="rect">
+            <a:avLst/>
+          </a:prstGeom>
+          <a:noFill/>
+        </p:spPr>
+        <p:txBody>
+          <a:bodyPr wrap="none">
+            <a:spAutoFit/>
+          </a:bodyPr>
+          <a:lstStyle/>
+          <a:p>
+            <a:pPr>
+              <a:defRPr sz="1000">
+                <a:solidFill>
+                  <a:srgbClr val="9CA3AF"/>
+                </a:solidFill>
+                <a:latin typeface="Arial"/>
+              </a:defRPr>
+            </a:pPr>
+            <a:r>
+              <a:t>StockPulse • Cloud-Native Warehouse &amp; Inventory Management Platform • Tanishq Singh</a:t>
+            </a:r>
+          </a:p>
+        </p:txBody>
+      </p:sp>
+      <p:sp>
+        <p:nvSpPr>
+          <p:cNvPr id="7" name="Rounded Rectangle 6"/>
+          <p:cNvSpPr/>
+          <p:nvPr/>
+        </p:nvSpPr>
+        <p:spPr>
+          <a:xfrm>
+            <a:off x="731520" y="1463040"/>
+            <a:ext cx="2468880" cy="4389120"/>
+          </a:xfrm>
+          <a:prstGeom prst="roundRect">
+            <a:avLst/>
+          </a:prstGeom>
+          <a:solidFill>
+            <a:srgbClr val="141B2D"/>
+          </a:solidFill>
+          <a:ln w="19050">
+            <a:solidFill>
+              <a:srgbClr val="2D374B"/>
+            </a:solidFill>
+          </a:ln>
+        </p:spPr>
+        <p:style>
+          <a:lnRef idx="1">
+            <a:schemeClr val="accent1"/>
+          </a:lnRef>
+          <a:fillRef idx="3">
+            <a:schemeClr val="accent1"/>
+          </a:fillRef>
+          <a:effectRef idx="2">
+            <a:schemeClr val="accent1"/>
+          </a:effectRef>
+          <a:fontRef idx="minor">
+            <a:schemeClr val="lt1"/>
+          </a:fontRef>
+        </p:style>
+        <p:txBody>
+          <a:bodyPr rtlCol="0" anchor="ctr"/>
+          <a:lstStyle/>
+          <a:p>
+            <a:pPr algn="ctr"/>
+          </a:p>
+        </p:txBody>
+      </p:sp>
+      <p:sp>
+        <p:nvSpPr>
+          <p:cNvPr id="8" name="TextBox 7"/>
+          <p:cNvSpPr txBox="1"/>
+          <p:nvPr/>
+        </p:nvSpPr>
+        <p:spPr>
+          <a:xfrm>
+            <a:off x="960120" y="1627632"/>
+            <a:ext cx="2011680" cy="4059936"/>
           </a:xfrm>
           <a:prstGeom prst="rect">
             <a:avLst/>
@@ -5822,7 +5818,7 @@
               </a:defRPr>
             </a:pPr>
             <a:r>
-              <a:t>Target: 100/100</a:t>
+              <a:t>App &amp; Quality</a:t>
             </a:r>
           </a:p>
           <a:p>
@@ -5832,13 +5828,13 @@
               </a:spcAft>
               <a:defRPr sz="1300">
                 <a:solidFill>
-                  <a:srgbClr val="F8FAFC"/>
-                </a:solidFill>
-                <a:latin typeface="Arial"/>
-              </a:defRPr>
-            </a:pPr>
-            <a:r>
-              <a:t>•  All 10 rubric modules met.</a:t>
+                  <a:srgbClr val="FFFFFF"/>
+                </a:solidFill>
+                <a:latin typeface="Arial"/>
+              </a:defRPr>
+            </a:pPr>
+            <a:r>
+              <a:t>•  M1: 3-Tier FastAPI/React.</a:t>
             </a:r>
           </a:p>
           <a:p>
@@ -5848,13 +5844,13 @@
               </a:spcAft>
               <a:defRPr sz="1300">
                 <a:solidFill>
-                  <a:srgbClr val="F8FAFC"/>
-                </a:solidFill>
-                <a:latin typeface="Arial"/>
-              </a:defRPr>
-            </a:pPr>
-            <a:r>
-              <a:t>•  14 verification screenshots.</a:t>
+                  <a:srgbClr val="FFFFFF"/>
+                </a:solidFill>
+                <a:latin typeface="Arial"/>
+              </a:defRPr>
+            </a:pPr>
+            <a:r>
+              <a:t>•  M2: 11 Pytest tests pass.</a:t>
             </a:r>
           </a:p>
           <a:p>
@@ -5864,13 +5860,13 @@
               </a:spcAft>
               <a:defRPr sz="1300">
                 <a:solidFill>
-                  <a:srgbClr val="F8FAFC"/>
-                </a:solidFill>
-                <a:latin typeface="Arial"/>
-              </a:defRPr>
-            </a:pPr>
-            <a:r>
-              <a:t>•  Complete troubleshooting labs.</a:t>
+                  <a:srgbClr val="FFFFFF"/>
+                </a:solidFill>
+                <a:latin typeface="Arial"/>
+              </a:defRPr>
+            </a:pPr>
+            <a:r>
+              <a:t>•  M3: Conventional Git commits.</a:t>
             </a:r>
           </a:p>
           <a:p>
@@ -5880,13 +5876,457 @@
               </a:spcAft>
               <a:defRPr sz="1300">
                 <a:solidFill>
-                  <a:srgbClr val="F8FAFC"/>
-                </a:solidFill>
-                <a:latin typeface="Arial"/>
-              </a:defRPr>
-            </a:pPr>
-            <a:r>
-              <a:t>•  Clean code and documentation.</a:t>
+                  <a:srgbClr val="FFFFFF"/>
+                </a:solidFill>
+                <a:latin typeface="Arial"/>
+              </a:defRPr>
+            </a:pPr>
+            <a:r>
+              <a:t>•  Full Swagger &amp; OpenAPI.</a:t>
+            </a:r>
+          </a:p>
+        </p:txBody>
+      </p:sp>
+      <p:sp>
+        <p:nvSpPr>
+          <p:cNvPr id="9" name="Rounded Rectangle 8"/>
+          <p:cNvSpPr/>
+          <p:nvPr/>
+        </p:nvSpPr>
+        <p:spPr>
+          <a:xfrm>
+            <a:off x="3429000" y="1463040"/>
+            <a:ext cx="2468880" cy="4389120"/>
+          </a:xfrm>
+          <a:prstGeom prst="roundRect">
+            <a:avLst/>
+          </a:prstGeom>
+          <a:solidFill>
+            <a:srgbClr val="141B2D"/>
+          </a:solidFill>
+          <a:ln w="19050">
+            <a:solidFill>
+              <a:srgbClr val="2D374B"/>
+            </a:solidFill>
+          </a:ln>
+        </p:spPr>
+        <p:style>
+          <a:lnRef idx="1">
+            <a:schemeClr val="accent1"/>
+          </a:lnRef>
+          <a:fillRef idx="3">
+            <a:schemeClr val="accent1"/>
+          </a:fillRef>
+          <a:effectRef idx="2">
+            <a:schemeClr val="accent1"/>
+          </a:effectRef>
+          <a:fontRef idx="minor">
+            <a:schemeClr val="lt1"/>
+          </a:fontRef>
+        </p:style>
+        <p:txBody>
+          <a:bodyPr rtlCol="0" anchor="ctr"/>
+          <a:lstStyle/>
+          <a:p>
+            <a:pPr algn="ctr"/>
+          </a:p>
+        </p:txBody>
+      </p:sp>
+      <p:sp>
+        <p:nvSpPr>
+          <p:cNvPr id="10" name="TextBox 9"/>
+          <p:cNvSpPr txBox="1"/>
+          <p:nvPr/>
+        </p:nvSpPr>
+        <p:spPr>
+          <a:xfrm>
+            <a:off x="3657600" y="1627632"/>
+            <a:ext cx="2011680" cy="4059936"/>
+          </a:xfrm>
+          <a:prstGeom prst="rect">
+            <a:avLst/>
+          </a:prstGeom>
+          <a:noFill/>
+        </p:spPr>
+        <p:txBody>
+          <a:bodyPr wrap="square">
+            <a:spAutoFit/>
+          </a:bodyPr>
+          <a:lstStyle/>
+          <a:p>
+            <a:pPr>
+              <a:spcAft>
+                <a:spcPts val="800"/>
+              </a:spcAft>
+              <a:defRPr sz="1700" b="1">
+                <a:solidFill>
+                  <a:srgbClr val="38BDF8"/>
+                </a:solidFill>
+                <a:latin typeface="Arial"/>
+              </a:defRPr>
+            </a:pPr>
+            <a:r>
+              <a:t>Containerization</a:t>
+            </a:r>
+          </a:p>
+          <a:p>
+            <a:pPr>
+              <a:spcAft>
+                <a:spcPts val="600"/>
+              </a:spcAft>
+              <a:defRPr sz="1300">
+                <a:solidFill>
+                  <a:srgbClr val="FFFFFF"/>
+                </a:solidFill>
+                <a:latin typeface="Arial"/>
+              </a:defRPr>
+            </a:pPr>
+            <a:r>
+              <a:t>•  M4: Multi-stage Docker.</a:t>
+            </a:r>
+          </a:p>
+          <a:p>
+            <a:pPr>
+              <a:spcAft>
+                <a:spcPts val="600"/>
+              </a:spcAft>
+              <a:defRPr sz="1300">
+                <a:solidFill>
+                  <a:srgbClr val="FFFFFF"/>
+                </a:solidFill>
+                <a:latin typeface="Arial"/>
+              </a:defRPr>
+            </a:pPr>
+            <a:r>
+              <a:t>•  Non-root UIDs 10001 &amp; 101.</a:t>
+            </a:r>
+          </a:p>
+          <a:p>
+            <a:pPr>
+              <a:spcAft>
+                <a:spcPts val="600"/>
+              </a:spcAft>
+              <a:defRPr sz="1300">
+                <a:solidFill>
+                  <a:srgbClr val="FFFFFF"/>
+                </a:solidFill>
+                <a:latin typeface="Arial"/>
+              </a:defRPr>
+            </a:pPr>
+            <a:r>
+              <a:t>•  Docker Compose healthchecks.</a:t>
+            </a:r>
+          </a:p>
+          <a:p>
+            <a:pPr>
+              <a:spcAft>
+                <a:spcPts val="600"/>
+              </a:spcAft>
+              <a:defRPr sz="1300">
+                <a:solidFill>
+                  <a:srgbClr val="FFFFFF"/>
+                </a:solidFill>
+                <a:latin typeface="Arial"/>
+              </a:defRPr>
+            </a:pPr>
+            <a:r>
+              <a:t>•  ACID Postgres storage.</a:t>
+            </a:r>
+          </a:p>
+        </p:txBody>
+      </p:sp>
+      <p:sp>
+        <p:nvSpPr>
+          <p:cNvPr id="11" name="Rounded Rectangle 10"/>
+          <p:cNvSpPr/>
+          <p:nvPr/>
+        </p:nvSpPr>
+        <p:spPr>
+          <a:xfrm>
+            <a:off x="6126480" y="1463040"/>
+            <a:ext cx="2468880" cy="4389120"/>
+          </a:xfrm>
+          <a:prstGeom prst="roundRect">
+            <a:avLst/>
+          </a:prstGeom>
+          <a:solidFill>
+            <a:srgbClr val="141B2D"/>
+          </a:solidFill>
+          <a:ln w="19050">
+            <a:solidFill>
+              <a:srgbClr val="2D374B"/>
+            </a:solidFill>
+          </a:ln>
+        </p:spPr>
+        <p:style>
+          <a:lnRef idx="1">
+            <a:schemeClr val="accent1"/>
+          </a:lnRef>
+          <a:fillRef idx="3">
+            <a:schemeClr val="accent1"/>
+          </a:fillRef>
+          <a:effectRef idx="2">
+            <a:schemeClr val="accent1"/>
+          </a:effectRef>
+          <a:fontRef idx="minor">
+            <a:schemeClr val="lt1"/>
+          </a:fontRef>
+        </p:style>
+        <p:txBody>
+          <a:bodyPr rtlCol="0" anchor="ctr"/>
+          <a:lstStyle/>
+          <a:p>
+            <a:pPr algn="ctr"/>
+          </a:p>
+        </p:txBody>
+      </p:sp>
+      <p:sp>
+        <p:nvSpPr>
+          <p:cNvPr id="12" name="TextBox 11"/>
+          <p:cNvSpPr txBox="1"/>
+          <p:nvPr/>
+        </p:nvSpPr>
+        <p:spPr>
+          <a:xfrm>
+            <a:off x="6355080" y="1627632"/>
+            <a:ext cx="2011680" cy="4059936"/>
+          </a:xfrm>
+          <a:prstGeom prst="rect">
+            <a:avLst/>
+          </a:prstGeom>
+          <a:noFill/>
+        </p:spPr>
+        <p:txBody>
+          <a:bodyPr wrap="square">
+            <a:spAutoFit/>
+          </a:bodyPr>
+          <a:lstStyle/>
+          <a:p>
+            <a:pPr>
+              <a:spcAft>
+                <a:spcPts val="800"/>
+              </a:spcAft>
+              <a:defRPr sz="1700" b="1">
+                <a:solidFill>
+                  <a:srgbClr val="FACC15"/>
+                </a:solidFill>
+                <a:latin typeface="Arial"/>
+              </a:defRPr>
+            </a:pPr>
+            <a:r>
+              <a:t>Pipeline &amp; Security</a:t>
+            </a:r>
+          </a:p>
+          <a:p>
+            <a:pPr>
+              <a:spcAft>
+                <a:spcPts val="600"/>
+              </a:spcAft>
+              <a:defRPr sz="1300">
+                <a:solidFill>
+                  <a:srgbClr val="FFFFFF"/>
+                </a:solidFill>
+                <a:latin typeface="Arial"/>
+              </a:defRPr>
+            </a:pPr>
+            <a:r>
+              <a:t>•  M5: 5-Stage GitHub Actions.</a:t>
+            </a:r>
+          </a:p>
+          <a:p>
+            <a:pPr>
+              <a:spcAft>
+                <a:spcPts val="600"/>
+              </a:spcAft>
+              <a:defRPr sz="1300">
+                <a:solidFill>
+                  <a:srgbClr val="FFFFFF"/>
+                </a:solidFill>
+                <a:latin typeface="Arial"/>
+              </a:defRPr>
+            </a:pPr>
+            <a:r>
+              <a:t>•  M6: Trivy DevSecOps scan.</a:t>
+            </a:r>
+          </a:p>
+          <a:p>
+            <a:pPr>
+              <a:spcAft>
+                <a:spcPts val="600"/>
+              </a:spcAft>
+              <a:defRPr sz="1300">
+                <a:solidFill>
+                  <a:srgbClr val="FFFFFF"/>
+                </a:solidFill>
+                <a:latin typeface="Arial"/>
+              </a:defRPr>
+            </a:pPr>
+            <a:r>
+              <a:t>•  M7: Terraform AWS EKS.</a:t>
+            </a:r>
+          </a:p>
+          <a:p>
+            <a:pPr>
+              <a:spcAft>
+                <a:spcPts val="600"/>
+              </a:spcAft>
+              <a:defRPr sz="1300">
+                <a:solidFill>
+                  <a:srgbClr val="FFFFFF"/>
+                </a:solidFill>
+                <a:latin typeface="Arial"/>
+              </a:defRPr>
+            </a:pPr>
+            <a:r>
+              <a:t>•  Sydney region verified.</a:t>
+            </a:r>
+          </a:p>
+        </p:txBody>
+      </p:sp>
+      <p:sp>
+        <p:nvSpPr>
+          <p:cNvPr id="13" name="Rounded Rectangle 12"/>
+          <p:cNvSpPr/>
+          <p:nvPr/>
+        </p:nvSpPr>
+        <p:spPr>
+          <a:xfrm>
+            <a:off x="8823960" y="1463040"/>
+            <a:ext cx="2468880" cy="4389120"/>
+          </a:xfrm>
+          <a:prstGeom prst="roundRect">
+            <a:avLst/>
+          </a:prstGeom>
+          <a:solidFill>
+            <a:srgbClr val="141B2D"/>
+          </a:solidFill>
+          <a:ln w="19050">
+            <a:solidFill>
+              <a:srgbClr val="2D374B"/>
+            </a:solidFill>
+          </a:ln>
+        </p:spPr>
+        <p:style>
+          <a:lnRef idx="1">
+            <a:schemeClr val="accent1"/>
+          </a:lnRef>
+          <a:fillRef idx="3">
+            <a:schemeClr val="accent1"/>
+          </a:fillRef>
+          <a:effectRef idx="2">
+            <a:schemeClr val="accent1"/>
+          </a:effectRef>
+          <a:fontRef idx="minor">
+            <a:schemeClr val="lt1"/>
+          </a:fontRef>
+        </p:style>
+        <p:txBody>
+          <a:bodyPr rtlCol="0" anchor="ctr"/>
+          <a:lstStyle/>
+          <a:p>
+            <a:pPr algn="ctr"/>
+          </a:p>
+        </p:txBody>
+      </p:sp>
+      <p:sp>
+        <p:nvSpPr>
+          <p:cNvPr id="14" name="TextBox 13"/>
+          <p:cNvSpPr txBox="1"/>
+          <p:nvPr/>
+        </p:nvSpPr>
+        <p:spPr>
+          <a:xfrm>
+            <a:off x="9052560" y="1627632"/>
+            <a:ext cx="2011680" cy="4059936"/>
+          </a:xfrm>
+          <a:prstGeom prst="rect">
+            <a:avLst/>
+          </a:prstGeom>
+          <a:noFill/>
+        </p:spPr>
+        <p:txBody>
+          <a:bodyPr wrap="square">
+            <a:spAutoFit/>
+          </a:bodyPr>
+          <a:lstStyle/>
+          <a:p>
+            <a:pPr>
+              <a:spcAft>
+                <a:spcPts val="800"/>
+              </a:spcAft>
+              <a:defRPr sz="1700" b="1">
+                <a:solidFill>
+                  <a:srgbClr val="34D399"/>
+                </a:solidFill>
+                <a:latin typeface="Arial"/>
+              </a:defRPr>
+            </a:pPr>
+            <a:r>
+              <a:t>Orchestration &amp; Ops</a:t>
+            </a:r>
+          </a:p>
+          <a:p>
+            <a:pPr>
+              <a:spcAft>
+                <a:spcPts val="600"/>
+              </a:spcAft>
+              <a:defRPr sz="1300">
+                <a:solidFill>
+                  <a:srgbClr val="FFFFFF"/>
+                </a:solidFill>
+                <a:latin typeface="Arial"/>
+              </a:defRPr>
+            </a:pPr>
+            <a:r>
+              <a:t>•  M8: Kubernetes Helm chart.</a:t>
+            </a:r>
+          </a:p>
+          <a:p>
+            <a:pPr>
+              <a:spcAft>
+                <a:spcPts val="600"/>
+              </a:spcAft>
+              <a:defRPr sz="1300">
+                <a:solidFill>
+                  <a:srgbClr val="FFFFFF"/>
+                </a:solidFill>
+                <a:latin typeface="Arial"/>
+              </a:defRPr>
+            </a:pPr>
+            <a:r>
+              <a:t>•  M9: Prometheus telemetry.</a:t>
+            </a:r>
+          </a:p>
+          <a:p>
+            <a:pPr>
+              <a:spcAft>
+                <a:spcPts val="600"/>
+              </a:spcAft>
+              <a:defRPr sz="1300">
+                <a:solidFill>
+                  <a:srgbClr val="FFFFFF"/>
+                </a:solidFill>
+                <a:latin typeface="Arial"/>
+              </a:defRPr>
+            </a:pPr>
+            <a:r>
+              <a:t>•  M10: Troubleshooting lab.</a:t>
+            </a:r>
+          </a:p>
+          <a:p>
+            <a:pPr>
+              <a:spcAft>
+                <a:spcPts val="600"/>
+              </a:spcAft>
+              <a:defRPr sz="1300">
+                <a:solidFill>
+                  <a:srgbClr val="FFFFFF"/>
+                </a:solidFill>
+                <a:latin typeface="Arial"/>
+              </a:defRPr>
+            </a:pPr>
+            <a:r>
+              <a:t>•  Score Target: 100 / 100.</a:t>
             </a:r>
           </a:p>
         </p:txBody>
@@ -5924,7 +6364,7 @@
             <a:avLst/>
           </a:prstGeom>
           <a:solidFill>
-            <a:srgbClr val="0F172A"/>
+            <a:srgbClr val="0B0F19"/>
           </a:solidFill>
           <a:ln>
             <a:noFill/>
@@ -5960,8 +6400,8 @@
         </p:nvSpPr>
         <p:spPr>
           <a:xfrm>
-            <a:off x="731520" y="365760"/>
-            <a:ext cx="7315200" cy="320040"/>
+            <a:off x="731520" y="320040"/>
+            <a:ext cx="10058400" cy="320040"/>
           </a:xfrm>
           <a:prstGeom prst="rect">
             <a:avLst/>
@@ -5969,7 +6409,7 @@
           <a:noFill/>
         </p:spPr>
         <p:txBody>
-          <a:bodyPr wrap="square">
+          <a:bodyPr wrap="none">
             <a:spAutoFit/>
           </a:bodyPr>
           <a:lstStyle/>
@@ -5996,8 +6436,8 @@
         </p:nvSpPr>
         <p:spPr>
           <a:xfrm>
-            <a:off x="731520" y="640080"/>
-            <a:ext cx="10515600" cy="640080"/>
+            <a:off x="731520" y="621792"/>
+            <a:ext cx="10698480" cy="685800"/>
           </a:xfrm>
           <a:prstGeom prst="rect">
             <a:avLst/>
@@ -6005,7 +6445,7 @@
           <a:noFill/>
         </p:spPr>
         <p:txBody>
-          <a:bodyPr wrap="square">
+          <a:bodyPr wrap="none">
             <a:spAutoFit/>
           </a:bodyPr>
           <a:lstStyle/>
@@ -6013,13 +6453,13 @@
             <a:pPr>
               <a:defRPr sz="2600" b="1">
                 <a:solidFill>
-                  <a:srgbClr val="F8FAFC"/>
-                </a:solidFill>
-                <a:latin typeface="Arial"/>
-              </a:defRPr>
-            </a:pPr>
-            <a:r>
-              <a:t>What We Built: Real-Time Warehouse Platform</a:t>
+                  <a:srgbClr val="FFFFFF"/>
+                </a:solidFill>
+                <a:latin typeface="Arial"/>
+              </a:defRPr>
+            </a:pPr>
+            <a:r>
+              <a:t>What We Built: Real-Time Warehouse Command Center</a:t>
             </a:r>
           </a:p>
         </p:txBody>
@@ -6032,14 +6472,14 @@
         </p:nvSpPr>
         <p:spPr>
           <a:xfrm>
-            <a:off x="731520" y="6309360"/>
+            <a:off x="731520" y="6327648"/>
             <a:ext cx="10728655" cy="18288"/>
           </a:xfrm>
           <a:prstGeom prst="rect">
             <a:avLst/>
           </a:prstGeom>
           <a:solidFill>
-            <a:srgbClr val="334155"/>
+            <a:srgbClr val="2D374B"/>
           </a:solidFill>
           <a:ln>
             <a:noFill/>
@@ -6075,7 +6515,7 @@
         </p:nvSpPr>
         <p:spPr>
           <a:xfrm>
-            <a:off x="731520" y="6355080"/>
+            <a:off x="731520" y="6364224"/>
             <a:ext cx="10728655" cy="320040"/>
           </a:xfrm>
           <a:prstGeom prst="rect">
@@ -6092,7 +6532,7 @@
             <a:pPr>
               <a:defRPr sz="1000">
                 <a:solidFill>
-                  <a:srgbClr val="94A3B8"/>
+                  <a:srgbClr val="9CA3AF"/>
                 </a:solidFill>
                 <a:latin typeface="Arial"/>
               </a:defRPr>
@@ -6118,11 +6558,11 @@
             <a:avLst/>
           </a:prstGeom>
           <a:solidFill>
-            <a:srgbClr val="1E293B"/>
+            <a:srgbClr val="141B2D"/>
           </a:solidFill>
           <a:ln w="19050">
             <a:solidFill>
-              <a:srgbClr val="334155"/>
+              <a:srgbClr val="2D374B"/>
             </a:solidFill>
           </a:ln>
         </p:spPr>
@@ -6156,8 +6596,8 @@
         </p:nvSpPr>
         <p:spPr>
           <a:xfrm>
-            <a:off x="960120" y="1645920"/>
-            <a:ext cx="2871216" cy="4023360"/>
+            <a:off x="960120" y="1627632"/>
+            <a:ext cx="2871216" cy="4059936"/>
           </a:xfrm>
           <a:prstGeom prst="rect">
             <a:avLst/>
@@ -6176,7 +6616,7 @@
               </a:spcAft>
               <a:defRPr sz="1700" b="1">
                 <a:solidFill>
-                  <a:srgbClr val="FBBF24"/>
+                  <a:srgbClr val="FACC15"/>
                 </a:solidFill>
                 <a:latin typeface="Arial"/>
               </a:defRPr>
@@ -6192,13 +6632,13 @@
               </a:spcAft>
               <a:defRPr sz="1300">
                 <a:solidFill>
-                  <a:srgbClr val="F8FAFC"/>
-                </a:solidFill>
-                <a:latin typeface="Arial"/>
-              </a:defRPr>
-            </a:pPr>
-            <a:r>
-              <a:t>•  Traditional warehouses track stock on paper or slow legacy software.</a:t>
+                  <a:srgbClr val="FFFFFF"/>
+                </a:solidFill>
+                <a:latin typeface="Arial"/>
+              </a:defRPr>
+            </a:pPr>
+            <a:r>
+              <a:t>•  Traditional warehouses track stock on paper or slow legacy spreadsheets.</a:t>
             </a:r>
           </a:p>
           <a:p>
@@ -6208,13 +6648,13 @@
               </a:spcAft>
               <a:defRPr sz="1300">
                 <a:solidFill>
-                  <a:srgbClr val="F8FAFC"/>
-                </a:solidFill>
-                <a:latin typeface="Arial"/>
-              </a:defRPr>
-            </a:pPr>
-            <a:r>
-              <a:t>•  Leads to human errors, accidental stockouts, and order delays.</a:t>
+                  <a:srgbClr val="FFFFFF"/>
+                </a:solidFill>
+                <a:latin typeface="Arial"/>
+              </a:defRPr>
+            </a:pPr>
+            <a:r>
+              <a:t>•  Causes costly stockouts, double-allocated orders, and dispatch delays.</a:t>
             </a:r>
           </a:p>
           <a:p>
@@ -6224,13 +6664,13 @@
               </a:spcAft>
               <a:defRPr sz="1300">
                 <a:solidFill>
-                  <a:srgbClr val="F8FAFC"/>
-                </a:solidFill>
-                <a:latin typeface="Arial"/>
-              </a:defRPr>
-            </a:pPr>
-            <a:r>
-              <a:t>•  Requires instant visibility when goods arrive or leave.</a:t>
+                  <a:srgbClr val="FFFFFF"/>
+                </a:solidFill>
+                <a:latin typeface="Arial"/>
+              </a:defRPr>
+            </a:pPr>
+            <a:r>
+              <a:t>•  No instant alerts when high-demand goods fall below safety limits.</a:t>
             </a:r>
           </a:p>
         </p:txBody>
@@ -6250,11 +6690,11 @@
             <a:avLst/>
           </a:prstGeom>
           <a:solidFill>
-            <a:srgbClr val="1E293B"/>
+            <a:srgbClr val="141B2D"/>
           </a:solidFill>
           <a:ln w="19050">
             <a:solidFill>
-              <a:srgbClr val="334155"/>
+              <a:srgbClr val="2D374B"/>
             </a:solidFill>
           </a:ln>
         </p:spPr>
@@ -6288,8 +6728,8 @@
         </p:nvSpPr>
         <p:spPr>
           <a:xfrm>
-            <a:off x="4654296" y="1645920"/>
-            <a:ext cx="2871216" cy="4023360"/>
+            <a:off x="4654296" y="1627632"/>
+            <a:ext cx="2871216" cy="4059936"/>
           </a:xfrm>
           <a:prstGeom prst="rect">
             <a:avLst/>
@@ -6324,13 +6764,13 @@
               </a:spcAft>
               <a:defRPr sz="1300">
                 <a:solidFill>
-                  <a:srgbClr val="F8FAFC"/>
-                </a:solidFill>
-                <a:latin typeface="Arial"/>
-              </a:defRPr>
-            </a:pPr>
-            <a:r>
-              <a:t>•  A real-time digital warehouse command center.</a:t>
+                  <a:srgbClr val="FFFFFF"/>
+                </a:solidFill>
+                <a:latin typeface="Arial"/>
+              </a:defRPr>
+            </a:pPr>
+            <a:r>
+              <a:t>•  Live digital warehouse dashboard tracking stock in real time.</a:t>
             </a:r>
           </a:p>
           <a:p>
@@ -6340,13 +6780,13 @@
               </a:spcAft>
               <a:defRPr sz="1300">
                 <a:solidFill>
-                  <a:srgbClr val="F8FAFC"/>
-                </a:solidFill>
-                <a:latin typeface="Arial"/>
-              </a:defRPr>
-            </a:pPr>
-            <a:r>
-              <a:t>•  Live tracking of SKU inventory, stock thresholds, and suppliers.</a:t>
+                  <a:srgbClr val="FFFFFF"/>
+                </a:solidFill>
+                <a:latin typeface="Arial"/>
+              </a:defRPr>
+            </a:pPr>
+            <a:r>
+              <a:t>•  Automated safety threshold warnings prevent unexpected shortages.</a:t>
             </a:r>
           </a:p>
           <a:p>
@@ -6356,13 +6796,13 @@
               </a:spcAft>
               <a:defRPr sz="1300">
                 <a:solidFill>
-                  <a:srgbClr val="F8FAFC"/>
-                </a:solidFill>
-                <a:latin typeface="Arial"/>
-              </a:defRPr>
-            </a:pPr>
-            <a:r>
-              <a:t>•  Instant visual alerts when items fall below safe limits.</a:t>
+                  <a:srgbClr val="FFFFFF"/>
+                </a:solidFill>
+                <a:latin typeface="Arial"/>
+              </a:defRPr>
+            </a:pPr>
+            <a:r>
+              <a:t>•  Strict transaction safety blocks race conditions on concurrent orders.</a:t>
             </a:r>
           </a:p>
           <a:p>
@@ -6372,13 +6812,13 @@
               </a:spcAft>
               <a:defRPr sz="1300">
                 <a:solidFill>
-                  <a:srgbClr val="F8FAFC"/>
-                </a:solidFill>
-                <a:latin typeface="Arial"/>
-              </a:defRPr>
-            </a:pPr>
-            <a:r>
-              <a:t>•  Built for fast, concurrent warehouse operations.</a:t>
+                  <a:srgbClr val="FFFFFF"/>
+                </a:solidFill>
+                <a:latin typeface="Arial"/>
+              </a:defRPr>
+            </a:pPr>
+            <a:r>
+              <a:t>•  Interactive REST API for instant warehouse barcode scanner integration.</a:t>
             </a:r>
           </a:p>
         </p:txBody>
@@ -6398,11 +6838,11 @@
             <a:avLst/>
           </a:prstGeom>
           <a:solidFill>
-            <a:srgbClr val="1E293B"/>
+            <a:srgbClr val="141B2D"/>
           </a:solidFill>
           <a:ln w="19050">
             <a:solidFill>
-              <a:srgbClr val="334155"/>
+              <a:srgbClr val="2D374B"/>
             </a:solidFill>
           </a:ln>
         </p:spPr>
@@ -6436,8 +6876,8 @@
         </p:nvSpPr>
         <p:spPr>
           <a:xfrm>
-            <a:off x="8348472" y="1645920"/>
-            <a:ext cx="2871216" cy="4023360"/>
+            <a:off x="8348472" y="1627632"/>
+            <a:ext cx="2871216" cy="4059936"/>
           </a:xfrm>
           <a:prstGeom prst="rect">
             <a:avLst/>
@@ -6462,7 +6902,7 @@
               </a:defRPr>
             </a:pPr>
             <a:r>
-              <a:t>Modern Cloud Delivery</a:t>
+              <a:t>Cloud-Native Delivery</a:t>
             </a:r>
           </a:p>
           <a:p>
@@ -6472,13 +6912,13 @@
               </a:spcAft>
               <a:defRPr sz="1300">
                 <a:solidFill>
-                  <a:srgbClr val="F8FAFC"/>
-                </a:solidFill>
-                <a:latin typeface="Arial"/>
-              </a:defRPr>
-            </a:pPr>
-            <a:r>
-              <a:t>•  Shipped as independent, self-healing microservices.</a:t>
+                  <a:srgbClr val="FFFFFF"/>
+                </a:solidFill>
+                <a:latin typeface="Arial"/>
+              </a:defRPr>
+            </a:pPr>
+            <a:r>
+              <a:t>•  100% containerized with Docker multi-stage builds.</a:t>
             </a:r>
           </a:p>
           <a:p>
@@ -6488,13 +6928,13 @@
               </a:spcAft>
               <a:defRPr sz="1300">
                 <a:solidFill>
-                  <a:srgbClr val="F8FAFC"/>
-                </a:solidFill>
-                <a:latin typeface="Arial"/>
-              </a:defRPr>
-            </a:pPr>
-            <a:r>
-              <a:t>•  Runs identically on local developer machines and AWS cloud.</a:t>
+                  <a:srgbClr val="FFFFFF"/>
+                </a:solidFill>
+                <a:latin typeface="Arial"/>
+              </a:defRPr>
+            </a:pPr>
+            <a:r>
+              <a:t>•  Self-healing Kubernetes cluster automatically restarts crashed services.</a:t>
             </a:r>
           </a:p>
           <a:p>
@@ -6504,13 +6944,13 @@
               </a:spcAft>
               <a:defRPr sz="1300">
                 <a:solidFill>
-                  <a:srgbClr val="F8FAFC"/>
-                </a:solidFill>
-                <a:latin typeface="Arial"/>
-              </a:defRPr>
-            </a:pPr>
-            <a:r>
-              <a:t>•  Zero downtime updates via automated Kubernetes rollouts.</a:t>
+                  <a:srgbClr val="FFFFFF"/>
+                </a:solidFill>
+                <a:latin typeface="Arial"/>
+              </a:defRPr>
+            </a:pPr>
+            <a:r>
+              <a:t>•  Zero-touch CI/CD pipeline tests, scans, and deploys every commit.</a:t>
             </a:r>
           </a:p>
         </p:txBody>
@@ -6548,7 +6988,7 @@
             <a:avLst/>
           </a:prstGeom>
           <a:solidFill>
-            <a:srgbClr val="0F172A"/>
+            <a:srgbClr val="0B0F19"/>
           </a:solidFill>
           <a:ln>
             <a:noFill/>
@@ -6584,8 +7024,8 @@
         </p:nvSpPr>
         <p:spPr>
           <a:xfrm>
-            <a:off x="731520" y="365760"/>
-            <a:ext cx="7315200" cy="320040"/>
+            <a:off x="731520" y="320040"/>
+            <a:ext cx="10058400" cy="320040"/>
           </a:xfrm>
           <a:prstGeom prst="rect">
             <a:avLst/>
@@ -6593,7 +7033,7 @@
           <a:noFill/>
         </p:spPr>
         <p:txBody>
-          <a:bodyPr wrap="square">
+          <a:bodyPr wrap="none">
             <a:spAutoFit/>
           </a:bodyPr>
           <a:lstStyle/>
@@ -6620,8 +7060,8 @@
         </p:nvSpPr>
         <p:spPr>
           <a:xfrm>
-            <a:off x="731520" y="640080"/>
-            <a:ext cx="10515600" cy="640080"/>
+            <a:off x="731520" y="621792"/>
+            <a:ext cx="10698480" cy="685800"/>
           </a:xfrm>
           <a:prstGeom prst="rect">
             <a:avLst/>
@@ -6629,7 +7069,7 @@
           <a:noFill/>
         </p:spPr>
         <p:txBody>
-          <a:bodyPr wrap="square">
+          <a:bodyPr wrap="none">
             <a:spAutoFit/>
           </a:bodyPr>
           <a:lstStyle/>
@@ -6637,13 +7077,13 @@
             <a:pPr>
               <a:defRPr sz="2600" b="1">
                 <a:solidFill>
-                  <a:srgbClr val="F8FAFC"/>
-                </a:solidFill>
-                <a:latin typeface="Arial"/>
-              </a:defRPr>
-            </a:pPr>
-            <a:r>
-              <a:t>How It Works: 3-Tier Microservice Architecture</a:t>
+                  <a:srgbClr val="FFFFFF"/>
+                </a:solidFill>
+                <a:latin typeface="Arial"/>
+              </a:defRPr>
+            </a:pPr>
+            <a:r>
+              <a:t>How It Works: 3-Tier Microservice Flow</a:t>
             </a:r>
           </a:p>
         </p:txBody>
@@ -6656,14 +7096,14 @@
         </p:nvSpPr>
         <p:spPr>
           <a:xfrm>
-            <a:off x="731520" y="6309360"/>
+            <a:off x="731520" y="6327648"/>
             <a:ext cx="10728655" cy="18288"/>
           </a:xfrm>
           <a:prstGeom prst="rect">
             <a:avLst/>
           </a:prstGeom>
           <a:solidFill>
-            <a:srgbClr val="334155"/>
+            <a:srgbClr val="2D374B"/>
           </a:solidFill>
           <a:ln>
             <a:noFill/>
@@ -6699,7 +7139,7 @@
         </p:nvSpPr>
         <p:spPr>
           <a:xfrm>
-            <a:off x="731520" y="6355080"/>
+            <a:off x="731520" y="6364224"/>
             <a:ext cx="10728655" cy="320040"/>
           </a:xfrm>
           <a:prstGeom prst="rect">
@@ -6716,7 +7156,7 @@
             <a:pPr>
               <a:defRPr sz="1000">
                 <a:solidFill>
-                  <a:srgbClr val="94A3B8"/>
+                  <a:srgbClr val="9CA3AF"/>
                 </a:solidFill>
                 <a:latin typeface="Arial"/>
               </a:defRPr>
@@ -6742,11 +7182,11 @@
             <a:avLst/>
           </a:prstGeom>
           <a:solidFill>
-            <a:srgbClr val="1E293B"/>
+            <a:srgbClr val="141B2D"/>
           </a:solidFill>
           <a:ln w="19050">
             <a:solidFill>
-              <a:srgbClr val="334155"/>
+              <a:srgbClr val="2D374B"/>
             </a:solidFill>
           </a:ln>
         </p:spPr>
@@ -6780,8 +7220,8 @@
         </p:nvSpPr>
         <p:spPr>
           <a:xfrm>
-            <a:off x="960120" y="1645920"/>
-            <a:ext cx="2871216" cy="4023360"/>
+            <a:off x="960120" y="1627632"/>
+            <a:ext cx="2871216" cy="4059936"/>
           </a:xfrm>
           <a:prstGeom prst="rect">
             <a:avLst/>
@@ -6816,13 +7256,13 @@
               </a:spcAft>
               <a:defRPr sz="1300">
                 <a:solidFill>
-                  <a:srgbClr val="F8FAFC"/>
-                </a:solidFill>
-                <a:latin typeface="Arial"/>
-              </a:defRPr>
-            </a:pPr>
-            <a:r>
-              <a:t>•  React 18 Single Page Application.</a:t>
+                  <a:srgbClr val="FFFFFF"/>
+                </a:solidFill>
+                <a:latin typeface="Arial"/>
+              </a:defRPr>
+            </a:pPr>
+            <a:r>
+              <a:t>•  React 18 Single Page Application with Tailwind CSS.</a:t>
             </a:r>
           </a:p>
           <a:p>
@@ -6832,13 +7272,13 @@
               </a:spcAft>
               <a:defRPr sz="1300">
                 <a:solidFill>
-                  <a:srgbClr val="F8FAFC"/>
-                </a:solidFill>
-                <a:latin typeface="Arial"/>
-              </a:defRPr>
-            </a:pPr>
-            <a:r>
-              <a:t>•  Served via ultra-light Nginx Alpine.</a:t>
+                  <a:srgbClr val="FFFFFF"/>
+                </a:solidFill>
+                <a:latin typeface="Arial"/>
+              </a:defRPr>
+            </a:pPr>
+            <a:r>
+              <a:t>•  Served via hardened Nginx Alpine as non-root (UID 101).</a:t>
             </a:r>
           </a:p>
           <a:p>
@@ -6848,13 +7288,13 @@
               </a:spcAft>
               <a:defRPr sz="1300">
                 <a:solidFill>
-                  <a:srgbClr val="F8FAFC"/>
-                </a:solidFill>
-                <a:latin typeface="Arial"/>
-              </a:defRPr>
-            </a:pPr>
-            <a:r>
-              <a:t>•  Live inventory counters &amp; restocking modal.</a:t>
+                  <a:srgbClr val="FFFFFF"/>
+                </a:solidFill>
+                <a:latin typeface="Arial"/>
+              </a:defRPr>
+            </a:pPr>
+            <a:r>
+              <a:t>•  Real-time stock indicators, restock forms, and search.</a:t>
             </a:r>
           </a:p>
           <a:p>
@@ -6864,13 +7304,13 @@
               </a:spcAft>
               <a:defRPr sz="1300">
                 <a:solidFill>
-                  <a:srgbClr val="F8FAFC"/>
-                </a:solidFill>
-                <a:latin typeface="Arial"/>
-              </a:defRPr>
-            </a:pPr>
-            <a:r>
-              <a:t>•  Runs as non-root user (UID 101) for security.</a:t>
+                  <a:srgbClr val="FFFFFF"/>
+                </a:solidFill>
+                <a:latin typeface="Arial"/>
+              </a:defRPr>
+            </a:pPr>
+            <a:r>
+              <a:t>•  Responsive layout optimized for warehouse tablet computers.</a:t>
             </a:r>
           </a:p>
         </p:txBody>
@@ -6890,11 +7330,11 @@
             <a:avLst/>
           </a:prstGeom>
           <a:solidFill>
-            <a:srgbClr val="1E293B"/>
+            <a:srgbClr val="141B2D"/>
           </a:solidFill>
           <a:ln w="19050">
             <a:solidFill>
-              <a:srgbClr val="334155"/>
+              <a:srgbClr val="2D374B"/>
             </a:solidFill>
           </a:ln>
         </p:spPr>
@@ -6928,8 +7368,8 @@
         </p:nvSpPr>
         <p:spPr>
           <a:xfrm>
-            <a:off x="4654296" y="1645920"/>
-            <a:ext cx="2871216" cy="4023360"/>
+            <a:off x="4654296" y="1627632"/>
+            <a:ext cx="2871216" cy="4059936"/>
           </a:xfrm>
           <a:prstGeom prst="rect">
             <a:avLst/>
@@ -6964,13 +7404,13 @@
               </a:spcAft>
               <a:defRPr sz="1300">
                 <a:solidFill>
-                  <a:srgbClr val="F8FAFC"/>
-                </a:solidFill>
-                <a:latin typeface="Arial"/>
-              </a:defRPr>
-            </a:pPr>
-            <a:r>
-              <a:t>•  Python 3.12 &amp; FastAPI framework.</a:t>
+                  <a:srgbClr val="FFFFFF"/>
+                </a:solidFill>
+                <a:latin typeface="Arial"/>
+              </a:defRPr>
+            </a:pPr>
+            <a:r>
+              <a:t>•  Python 3.12 &amp; FastAPI asynchronous ASGI server.</a:t>
             </a:r>
           </a:p>
           <a:p>
@@ -6980,13 +7420,13 @@
               </a:spcAft>
               <a:defRPr sz="1300">
                 <a:solidFill>
-                  <a:srgbClr val="F8FAFC"/>
-                </a:solidFill>
-                <a:latin typeface="Arial"/>
-              </a:defRPr>
-            </a:pPr>
-            <a:r>
-              <a:t>•  Validates all incoming warehouse transactions.</a:t>
+                  <a:srgbClr val="FFFFFF"/>
+                </a:solidFill>
+                <a:latin typeface="Arial"/>
+              </a:defRPr>
+            </a:pPr>
+            <a:r>
+              <a:t>•  Strict Pydantic v2 schemas validate all stock entries.</a:t>
             </a:r>
           </a:p>
           <a:p>
@@ -6996,13 +7436,13 @@
               </a:spcAft>
               <a:defRPr sz="1300">
                 <a:solidFill>
-                  <a:srgbClr val="F8FAFC"/>
-                </a:solidFill>
-                <a:latin typeface="Arial"/>
-              </a:defRPr>
-            </a:pPr>
-            <a:r>
-              <a:t>•  Built-in health probes (/health) and metrics (/metrics).</a:t>
+                  <a:srgbClr val="FFFFFF"/>
+                </a:solidFill>
+                <a:latin typeface="Arial"/>
+              </a:defRPr>
+            </a:pPr>
+            <a:r>
+              <a:t>•  Built-in health probes (/health) and Prometheus metrics (/metrics).</a:t>
             </a:r>
           </a:p>
           <a:p>
@@ -7012,13 +7452,13 @@
               </a:spcAft>
               <a:defRPr sz="1300">
                 <a:solidFill>
-                  <a:srgbClr val="F8FAFC"/>
-                </a:solidFill>
-                <a:latin typeface="Arial"/>
-              </a:defRPr>
-            </a:pPr>
-            <a:r>
-              <a:t>•  Runs as non-root user (UID 10001).</a:t>
+                  <a:srgbClr val="FFFFFF"/>
+                </a:solidFill>
+                <a:latin typeface="Arial"/>
+              </a:defRPr>
+            </a:pPr>
+            <a:r>
+              <a:t>•  Executes safely as non-root user (UID 10001).</a:t>
             </a:r>
           </a:p>
         </p:txBody>
@@ -7038,11 +7478,11 @@
             <a:avLst/>
           </a:prstGeom>
           <a:solidFill>
-            <a:srgbClr val="1E293B"/>
+            <a:srgbClr val="141B2D"/>
           </a:solidFill>
           <a:ln w="19050">
             <a:solidFill>
-              <a:srgbClr val="334155"/>
+              <a:srgbClr val="2D374B"/>
             </a:solidFill>
           </a:ln>
         </p:spPr>
@@ -7076,8 +7516,8 @@
         </p:nvSpPr>
         <p:spPr>
           <a:xfrm>
-            <a:off x="8348472" y="1645920"/>
-            <a:ext cx="2871216" cy="4023360"/>
+            <a:off x="8348472" y="1627632"/>
+            <a:ext cx="2871216" cy="4059936"/>
           </a:xfrm>
           <a:prstGeom prst="rect">
             <a:avLst/>
@@ -7096,7 +7536,7 @@
               </a:spcAft>
               <a:defRPr sz="1700" b="1">
                 <a:solidFill>
-                  <a:srgbClr val="FBBF24"/>
+                  <a:srgbClr val="FACC15"/>
                 </a:solidFill>
                 <a:latin typeface="Arial"/>
               </a:defRPr>
@@ -7112,7 +7552,7 @@
               </a:spcAft>
               <a:defRPr sz="1300">
                 <a:solidFill>
-                  <a:srgbClr val="F8FAFC"/>
+                  <a:srgbClr val="FFFFFF"/>
                 </a:solidFill>
                 <a:latin typeface="Arial"/>
               </a:defRPr>
@@ -7128,13 +7568,13 @@
               </a:spcAft>
               <a:defRPr sz="1300">
                 <a:solidFill>
-                  <a:srgbClr val="F8FAFC"/>
-                </a:solidFill>
-                <a:latin typeface="Arial"/>
-              </a:defRPr>
-            </a:pPr>
-            <a:r>
-              <a:t>•  Guarantees ACID transactions (zero phantom updates).</a:t>
+                  <a:srgbClr val="FFFFFF"/>
+                </a:solidFill>
+                <a:latin typeface="Arial"/>
+              </a:defRPr>
+            </a:pPr>
+            <a:r>
+              <a:t>•  ACID transactions guarantee exact inventory counts.</a:t>
             </a:r>
           </a:p>
           <a:p>
@@ -7144,13 +7584,13 @@
               </a:spcAft>
               <a:defRPr sz="1300">
                 <a:solidFill>
-                  <a:srgbClr val="F8FAFC"/>
-                </a:solidFill>
-                <a:latin typeface="Arial"/>
-              </a:defRPr>
-            </a:pPr>
-            <a:r>
-              <a:t>•  Persistent storage volumes prevent data loss.</a:t>
+                  <a:srgbClr val="FFFFFF"/>
+                </a:solidFill>
+                <a:latin typeface="Arial"/>
+              </a:defRPr>
+            </a:pPr>
+            <a:r>
+              <a:t>•  Alembic automated migrations handle database schema.</a:t>
             </a:r>
           </a:p>
           <a:p>
@@ -7160,13 +7600,13 @@
               </a:spcAft>
               <a:defRPr sz="1300">
                 <a:solidFill>
-                  <a:srgbClr val="F8FAFC"/>
-                </a:solidFill>
-                <a:latin typeface="Arial"/>
-              </a:defRPr>
-            </a:pPr>
-            <a:r>
-              <a:t>•  Automatic schema initialization on launch.</a:t>
+                  <a:srgbClr val="FFFFFF"/>
+                </a:solidFill>
+                <a:latin typeface="Arial"/>
+              </a:defRPr>
+            </a:pPr>
+            <a:r>
+              <a:t>•  Persistent Volumes ensure data survives container restarts.</a:t>
             </a:r>
           </a:p>
         </p:txBody>
@@ -7204,7 +7644,7 @@
             <a:avLst/>
           </a:prstGeom>
           <a:solidFill>
-            <a:srgbClr val="0F172A"/>
+            <a:srgbClr val="0B0F19"/>
           </a:solidFill>
           <a:ln>
             <a:noFill/>
@@ -7240,8 +7680,8 @@
         </p:nvSpPr>
         <p:spPr>
           <a:xfrm>
-            <a:off x="731520" y="365760"/>
-            <a:ext cx="7315200" cy="320040"/>
+            <a:off x="731520" y="320040"/>
+            <a:ext cx="10058400" cy="320040"/>
           </a:xfrm>
           <a:prstGeom prst="rect">
             <a:avLst/>
@@ -7249,7 +7689,7 @@
           <a:noFill/>
         </p:spPr>
         <p:txBody>
-          <a:bodyPr wrap="square">
+          <a:bodyPr wrap="none">
             <a:spAutoFit/>
           </a:bodyPr>
           <a:lstStyle/>
@@ -7257,13 +7697,13 @@
             <a:pPr>
               <a:defRPr sz="1100" b="1">
                 <a:solidFill>
-                  <a:srgbClr val="38BDF8"/>
-                </a:solidFill>
-                <a:latin typeface="Arial"/>
-              </a:defRPr>
-            </a:pPr>
-            <a:r>
-              <a:t>03. REPOSITORY &amp; CODE QUALITY</a:t>
+                  <a:srgbClr val="FACC15"/>
+                </a:solidFill>
+                <a:latin typeface="Arial"/>
+              </a:defRPr>
+            </a:pPr>
+            <a:r>
+              <a:t>★ MANDATORY PROOF OF CONCEPT  |  03. REPOSITORY &amp; CODE QUALITY</a:t>
             </a:r>
           </a:p>
         </p:txBody>
@@ -7276,8 +7716,8 @@
         </p:nvSpPr>
         <p:spPr>
           <a:xfrm>
-            <a:off x="731520" y="640080"/>
-            <a:ext cx="10515600" cy="640080"/>
+            <a:off x="731520" y="621792"/>
+            <a:ext cx="10698480" cy="685800"/>
           </a:xfrm>
           <a:prstGeom prst="rect">
             <a:avLst/>
@@ -7285,7 +7725,7 @@
           <a:noFill/>
         </p:spPr>
         <p:txBody>
-          <a:bodyPr wrap="square">
+          <a:bodyPr wrap="none">
             <a:spAutoFit/>
           </a:bodyPr>
           <a:lstStyle/>
@@ -7293,7 +7733,7 @@
             <a:pPr>
               <a:defRPr sz="2600" b="1">
                 <a:solidFill>
-                  <a:srgbClr val="F8FAFC"/>
+                  <a:srgbClr val="FFFFFF"/>
                 </a:solidFill>
                 <a:latin typeface="Arial"/>
               </a:defRPr>
@@ -7312,14 +7752,14 @@
         </p:nvSpPr>
         <p:spPr>
           <a:xfrm>
-            <a:off x="731520" y="6309360"/>
+            <a:off x="731520" y="6327648"/>
             <a:ext cx="10728655" cy="18288"/>
           </a:xfrm>
           <a:prstGeom prst="rect">
             <a:avLst/>
           </a:prstGeom>
           <a:solidFill>
-            <a:srgbClr val="334155"/>
+            <a:srgbClr val="2D374B"/>
           </a:solidFill>
           <a:ln>
             <a:noFill/>
@@ -7355,7 +7795,7 @@
         </p:nvSpPr>
         <p:spPr>
           <a:xfrm>
-            <a:off x="731520" y="6355080"/>
+            <a:off x="731520" y="6364224"/>
             <a:ext cx="10728655" cy="320040"/>
           </a:xfrm>
           <a:prstGeom prst="rect">
@@ -7372,7 +7812,7 @@
             <a:pPr>
               <a:defRPr sz="1000">
                 <a:solidFill>
-                  <a:srgbClr val="94A3B8"/>
+                  <a:srgbClr val="9CA3AF"/>
                 </a:solidFill>
                 <a:latin typeface="Arial"/>
               </a:defRPr>
@@ -7398,11 +7838,11 @@
             <a:avLst/>
           </a:prstGeom>
           <a:solidFill>
-            <a:srgbClr val="1E293B"/>
+            <a:srgbClr val="141B2D"/>
           </a:solidFill>
           <a:ln w="19050">
             <a:solidFill>
-              <a:srgbClr val="334155"/>
+              <a:srgbClr val="2D374B"/>
             </a:solidFill>
           </a:ln>
         </p:spPr>
@@ -7436,8 +7876,8 @@
         </p:nvSpPr>
         <p:spPr>
           <a:xfrm>
-            <a:off x="960120" y="1645920"/>
-            <a:ext cx="3657600" cy="4023360"/>
+            <a:off x="960120" y="1627632"/>
+            <a:ext cx="3657600" cy="4059936"/>
           </a:xfrm>
           <a:prstGeom prst="rect">
             <a:avLst/>
@@ -7462,7 +7902,7 @@
               </a:defRPr>
             </a:pPr>
             <a:r>
-              <a:t>Modular Engineering Layout</a:t>
+              <a:t>Modular Project Layout</a:t>
             </a:r>
           </a:p>
           <a:p>
@@ -7472,13 +7912,13 @@
               </a:spcAft>
               <a:defRPr sz="1300">
                 <a:solidFill>
-                  <a:srgbClr val="F8FAFC"/>
-                </a:solidFill>
-                <a:latin typeface="Arial"/>
-              </a:defRPr>
-            </a:pPr>
-            <a:r>
-              <a:t>•  Clear separation of frontend, backend, and infrastructure code.</a:t>
+                  <a:srgbClr val="FFFFFF"/>
+                </a:solidFill>
+                <a:latin typeface="Arial"/>
+              </a:defRPr>
+            </a:pPr>
+            <a:r>
+              <a:t>•  Clean separation of frontend, backend, and infrastructure code.</a:t>
             </a:r>
           </a:p>
           <a:p>
@@ -7488,13 +7928,13 @@
               </a:spcAft>
               <a:defRPr sz="1300">
                 <a:solidFill>
-                  <a:srgbClr val="F8FAFC"/>
-                </a:solidFill>
-                <a:latin typeface="Arial"/>
-              </a:defRPr>
-            </a:pPr>
-            <a:r>
-              <a:t>•  Automated Pytest test suite (11 unit &amp; integration tests passing).</a:t>
+                  <a:srgbClr val="FFFFFF"/>
+                </a:solidFill>
+                <a:latin typeface="Arial"/>
+              </a:defRPr>
+            </a:pPr>
+            <a:r>
+              <a:t>•  Automated Pytest suite: 11 unit &amp; integration tests passing.</a:t>
             </a:r>
           </a:p>
           <a:p>
@@ -7504,13 +7944,13 @@
               </a:spcAft>
               <a:defRPr sz="1300">
                 <a:solidFill>
-                  <a:srgbClr val="F8FAFC"/>
-                </a:solidFill>
-                <a:latin typeface="Arial"/>
-              </a:defRPr>
-            </a:pPr>
-            <a:r>
-              <a:t>•  Infrastructure as Code: Helm charts and Terraform defined in repo.</a:t>
+                  <a:srgbClr val="FFFFFF"/>
+                </a:solidFill>
+                <a:latin typeface="Arial"/>
+              </a:defRPr>
+            </a:pPr>
+            <a:r>
+              <a:t>•  Infrastructure as Code: Complete Helm chart and Terraform modules.</a:t>
             </a:r>
           </a:p>
           <a:p>
@@ -7520,13 +7960,13 @@
               </a:spcAft>
               <a:defRPr sz="1300">
                 <a:solidFill>
-                  <a:srgbClr val="F8FAFC"/>
-                </a:solidFill>
-                <a:latin typeface="Arial"/>
-              </a:defRPr>
-            </a:pPr>
-            <a:r>
-              <a:t>•  Production configuration files (.env, Dockerfiles) fully documented.</a:t>
+                  <a:srgbClr val="FFFFFF"/>
+                </a:solidFill>
+                <a:latin typeface="Arial"/>
+              </a:defRPr>
+            </a:pPr>
+            <a:r>
+              <a:t>•  Production documentation: Architecture, Runbooks, and Rubric guide.</a:t>
             </a:r>
           </a:p>
         </p:txBody>
@@ -7546,7 +7986,7 @@
             <a:avLst/>
           </a:prstGeom>
           <a:solidFill>
-            <a:srgbClr val="334155"/>
+            <a:srgbClr val="2D374B"/>
           </a:solidFill>
           <a:ln>
             <a:noFill/>
@@ -7631,7 +8071,7 @@
             <a:avLst/>
           </a:prstGeom>
           <a:solidFill>
-            <a:srgbClr val="0F172A"/>
+            <a:srgbClr val="0B0F19"/>
           </a:solidFill>
           <a:ln>
             <a:noFill/>
@@ -7667,8 +8107,8 @@
         </p:nvSpPr>
         <p:spPr>
           <a:xfrm>
-            <a:off x="731520" y="365760"/>
-            <a:ext cx="7315200" cy="320040"/>
+            <a:off x="731520" y="320040"/>
+            <a:ext cx="10058400" cy="320040"/>
           </a:xfrm>
           <a:prstGeom prst="rect">
             <a:avLst/>
@@ -7676,7 +8116,7 @@
           <a:noFill/>
         </p:spPr>
         <p:txBody>
-          <a:bodyPr wrap="square">
+          <a:bodyPr wrap="none">
             <a:spAutoFit/>
           </a:bodyPr>
           <a:lstStyle/>
@@ -7703,8 +8143,8 @@
         </p:nvSpPr>
         <p:spPr>
           <a:xfrm>
-            <a:off x="731520" y="640080"/>
-            <a:ext cx="10515600" cy="640080"/>
+            <a:off x="731520" y="621792"/>
+            <a:ext cx="10698480" cy="685800"/>
           </a:xfrm>
           <a:prstGeom prst="rect">
             <a:avLst/>
@@ -7712,7 +8152,7 @@
           <a:noFill/>
         </p:spPr>
         <p:txBody>
-          <a:bodyPr wrap="square">
+          <a:bodyPr wrap="none">
             <a:spAutoFit/>
           </a:bodyPr>
           <a:lstStyle/>
@@ -7720,13 +8160,13 @@
             <a:pPr>
               <a:defRPr sz="2600" b="1">
                 <a:solidFill>
-                  <a:srgbClr val="F8FAFC"/>
-                </a:solidFill>
-                <a:latin typeface="Arial"/>
-              </a:defRPr>
-            </a:pPr>
-            <a:r>
-              <a:t>Technology Stack: Cloud-Native &amp; Production-Ready</a:t>
+                  <a:srgbClr val="FFFFFF"/>
+                </a:solidFill>
+                <a:latin typeface="Arial"/>
+              </a:defRPr>
+            </a:pPr>
+            <a:r>
+              <a:t>Technology Stack: Cloud-Native &amp; Production-Grade</a:t>
             </a:r>
           </a:p>
         </p:txBody>
@@ -7739,14 +8179,14 @@
         </p:nvSpPr>
         <p:spPr>
           <a:xfrm>
-            <a:off x="731520" y="6309360"/>
+            <a:off x="731520" y="6327648"/>
             <a:ext cx="10728655" cy="18288"/>
           </a:xfrm>
           <a:prstGeom prst="rect">
             <a:avLst/>
           </a:prstGeom>
           <a:solidFill>
-            <a:srgbClr val="334155"/>
+            <a:srgbClr val="2D374B"/>
           </a:solidFill>
           <a:ln>
             <a:noFill/>
@@ -7782,7 +8222,7 @@
         </p:nvSpPr>
         <p:spPr>
           <a:xfrm>
-            <a:off x="731520" y="6355080"/>
+            <a:off x="731520" y="6364224"/>
             <a:ext cx="10728655" cy="320040"/>
           </a:xfrm>
           <a:prstGeom prst="rect">
@@ -7799,7 +8239,7 @@
             <a:pPr>
               <a:defRPr sz="1000">
                 <a:solidFill>
-                  <a:srgbClr val="94A3B8"/>
+                  <a:srgbClr val="9CA3AF"/>
                 </a:solidFill>
                 <a:latin typeface="Arial"/>
               </a:defRPr>
@@ -7825,11 +8265,11 @@
             <a:avLst/>
           </a:prstGeom>
           <a:solidFill>
-            <a:srgbClr val="1E293B"/>
+            <a:srgbClr val="141B2D"/>
           </a:solidFill>
           <a:ln w="19050">
             <a:solidFill>
-              <a:srgbClr val="334155"/>
+              <a:srgbClr val="2D374B"/>
             </a:solidFill>
           </a:ln>
         </p:spPr>
@@ -7863,8 +8303,8 @@
         </p:nvSpPr>
         <p:spPr>
           <a:xfrm>
-            <a:off x="960120" y="1645920"/>
-            <a:ext cx="2011680" cy="4023360"/>
+            <a:off x="960120" y="1627632"/>
+            <a:ext cx="2011680" cy="4059936"/>
           </a:xfrm>
           <a:prstGeom prst="rect">
             <a:avLst/>
@@ -7889,7 +8329,7 @@
               </a:defRPr>
             </a:pPr>
             <a:r>
-              <a:t>Core App Tier</a:t>
+              <a:t>Application Tier</a:t>
             </a:r>
           </a:p>
           <a:p>
@@ -7899,13 +8339,13 @@
               </a:spcAft>
               <a:defRPr sz="1300">
                 <a:solidFill>
-                  <a:srgbClr val="F8FAFC"/>
-                </a:solidFill>
-                <a:latin typeface="Arial"/>
-              </a:defRPr>
-            </a:pPr>
-            <a:r>
-              <a:t>•  Python 3.12: High speed runtime.</a:t>
+                  <a:srgbClr val="FFFFFF"/>
+                </a:solidFill>
+                <a:latin typeface="Arial"/>
+              </a:defRPr>
+            </a:pPr>
+            <a:r>
+              <a:t>•  Python 3.12: High-speed async runtime.</a:t>
             </a:r>
           </a:p>
           <a:p>
@@ -7915,13 +8355,13 @@
               </a:spcAft>
               <a:defRPr sz="1300">
                 <a:solidFill>
-                  <a:srgbClr val="F8FAFC"/>
-                </a:solidFill>
-                <a:latin typeface="Arial"/>
-              </a:defRPr>
-            </a:pPr>
-            <a:r>
-              <a:t>•  FastAPI: Modern async ASGI API.</a:t>
+                  <a:srgbClr val="FFFFFF"/>
+                </a:solidFill>
+                <a:latin typeface="Arial"/>
+              </a:defRPr>
+            </a:pPr>
+            <a:r>
+              <a:t>•  FastAPI: Modern async REST API.</a:t>
             </a:r>
           </a:p>
           <a:p>
@@ -7931,7 +8371,7 @@
               </a:spcAft>
               <a:defRPr sz="1300">
                 <a:solidFill>
-                  <a:srgbClr val="F8FAFC"/>
+                  <a:srgbClr val="FFFFFF"/>
                 </a:solidFill>
                 <a:latin typeface="Arial"/>
               </a:defRPr>
@@ -7947,13 +8387,13 @@
               </a:spcAft>
               <a:defRPr sz="1300">
                 <a:solidFill>
-                  <a:srgbClr val="F8FAFC"/>
-                </a:solidFill>
-                <a:latin typeface="Arial"/>
-              </a:defRPr>
-            </a:pPr>
-            <a:r>
-              <a:t>•  Vite: Ultra-fast frontend build.</a:t>
+                  <a:srgbClr val="FFFFFF"/>
+                </a:solidFill>
+                <a:latin typeface="Arial"/>
+              </a:defRPr>
+            </a:pPr>
+            <a:r>
+              <a:t>•  Vite: Lightning-fast frontend build.</a:t>
             </a:r>
           </a:p>
         </p:txBody>
@@ -7973,11 +8413,11 @@
             <a:avLst/>
           </a:prstGeom>
           <a:solidFill>
-            <a:srgbClr val="1E293B"/>
+            <a:srgbClr val="141B2D"/>
           </a:solidFill>
           <a:ln w="19050">
             <a:solidFill>
-              <a:srgbClr val="334155"/>
+              <a:srgbClr val="2D374B"/>
             </a:solidFill>
           </a:ln>
         </p:spPr>
@@ -8011,8 +8451,8 @@
         </p:nvSpPr>
         <p:spPr>
           <a:xfrm>
-            <a:off x="3657600" y="1645920"/>
-            <a:ext cx="2011680" cy="4023360"/>
+            <a:off x="3657600" y="1627632"/>
+            <a:ext cx="2011680" cy="4059936"/>
           </a:xfrm>
           <a:prstGeom prst="rect">
             <a:avLst/>
@@ -8037,7 +8477,7 @@
               </a:defRPr>
             </a:pPr>
             <a:r>
-              <a:t>Data &amp; State</a:t>
+              <a:t>Data &amp; Storage</a:t>
             </a:r>
           </a:p>
           <a:p>
@@ -8047,13 +8487,13 @@
               </a:spcAft>
               <a:defRPr sz="1300">
                 <a:solidFill>
-                  <a:srgbClr val="F8FAFC"/>
-                </a:solidFill>
-                <a:latin typeface="Arial"/>
-              </a:defRPr>
-            </a:pPr>
-            <a:r>
-              <a:t>•  PostgreSQL 16: ACID database.</a:t>
+                  <a:srgbClr val="FFFFFF"/>
+                </a:solidFill>
+                <a:latin typeface="Arial"/>
+              </a:defRPr>
+            </a:pPr>
+            <a:r>
+              <a:t>•  PostgreSQL 16: Relational ACID DB.</a:t>
             </a:r>
           </a:p>
           <a:p>
@@ -8063,13 +8503,13 @@
               </a:spcAft>
               <a:defRPr sz="1300">
                 <a:solidFill>
-                  <a:srgbClr val="F8FAFC"/>
-                </a:solidFill>
-                <a:latin typeface="Arial"/>
-              </a:defRPr>
-            </a:pPr>
-            <a:r>
-              <a:t>•  SQLAlchemy 2: Safe database ORM.</a:t>
+                  <a:srgbClr val="FFFFFF"/>
+                </a:solidFill>
+                <a:latin typeface="Arial"/>
+              </a:defRPr>
+            </a:pPr>
+            <a:r>
+              <a:t>•  SQLAlchemy 2: Safe async ORM.</a:t>
             </a:r>
           </a:p>
           <a:p>
@@ -8079,13 +8519,13 @@
               </a:spcAft>
               <a:defRPr sz="1300">
                 <a:solidFill>
-                  <a:srgbClr val="F8FAFC"/>
-                </a:solidFill>
-                <a:latin typeface="Arial"/>
-              </a:defRPr>
-            </a:pPr>
-            <a:r>
-              <a:t>•  Pydantic v2: Strict data validation.</a:t>
+                  <a:srgbClr val="FFFFFF"/>
+                </a:solidFill>
+                <a:latin typeface="Arial"/>
+              </a:defRPr>
+            </a:pPr>
+            <a:r>
+              <a:t>•  Alembic: Schema migration tracking.</a:t>
             </a:r>
           </a:p>
           <a:p>
@@ -8095,13 +8535,13 @@
               </a:spcAft>
               <a:defRPr sz="1300">
                 <a:solidFill>
-                  <a:srgbClr val="F8FAFC"/>
-                </a:solidFill>
-                <a:latin typeface="Arial"/>
-              </a:defRPr>
-            </a:pPr>
-            <a:r>
-              <a:t>•  Persistent Volumes: Durable data.</a:t>
+                  <a:srgbClr val="FFFFFF"/>
+                </a:solidFill>
+                <a:latin typeface="Arial"/>
+              </a:defRPr>
+            </a:pPr>
+            <a:r>
+              <a:t>•  EBS gp3: Persistent storage.</a:t>
             </a:r>
           </a:p>
         </p:txBody>
@@ -8121,11 +8561,11 @@
             <a:avLst/>
           </a:prstGeom>
           <a:solidFill>
-            <a:srgbClr val="1E293B"/>
+            <a:srgbClr val="141B2D"/>
           </a:solidFill>
           <a:ln w="19050">
             <a:solidFill>
-              <a:srgbClr val="334155"/>
+              <a:srgbClr val="2D374B"/>
             </a:solidFill>
           </a:ln>
         </p:spPr>
@@ -8159,8 +8599,8 @@
         </p:nvSpPr>
         <p:spPr>
           <a:xfrm>
-            <a:off x="6355080" y="1645920"/>
-            <a:ext cx="2011680" cy="4023360"/>
+            <a:off x="6355080" y="1627632"/>
+            <a:ext cx="2011680" cy="4059936"/>
           </a:xfrm>
           <a:prstGeom prst="rect">
             <a:avLst/>
@@ -8179,7 +8619,7 @@
               </a:spcAft>
               <a:defRPr sz="1700" b="1">
                 <a:solidFill>
-                  <a:srgbClr val="FBBF24"/>
+                  <a:srgbClr val="FACC15"/>
                 </a:solidFill>
                 <a:latin typeface="Arial"/>
               </a:defRPr>
@@ -8195,7 +8635,7 @@
               </a:spcAft>
               <a:defRPr sz="1300">
                 <a:solidFill>
-                  <a:srgbClr val="F8FAFC"/>
+                  <a:srgbClr val="FFFFFF"/>
                 </a:solidFill>
                 <a:latin typeface="Arial"/>
               </a:defRPr>
@@ -8211,13 +8651,13 @@
               </a:spcAft>
               <a:defRPr sz="1300">
                 <a:solidFill>
-                  <a:srgbClr val="F8FAFC"/>
-                </a:solidFill>
-                <a:latin typeface="Arial"/>
-              </a:defRPr>
-            </a:pPr>
-            <a:r>
-              <a:t>•  Kubernetes: Container self-healing.</a:t>
+                  <a:srgbClr val="FFFFFF"/>
+                </a:solidFill>
+                <a:latin typeface="Arial"/>
+              </a:defRPr>
+            </a:pPr>
+            <a:r>
+              <a:t>•  Kubernetes: Self-healing orchestration.</a:t>
             </a:r>
           </a:p>
           <a:p>
@@ -8227,7 +8667,7 @@
               </a:spcAft>
               <a:defRPr sz="1300">
                 <a:solidFill>
-                  <a:srgbClr val="F8FAFC"/>
+                  <a:srgbClr val="FFFFFF"/>
                 </a:solidFill>
                 <a:latin typeface="Arial"/>
               </a:defRPr>
@@ -8243,13 +8683,13 @@
               </a:spcAft>
               <a:defRPr sz="1300">
                 <a:solidFill>
-                  <a:srgbClr val="F8FAFC"/>
-                </a:solidFill>
-                <a:latin typeface="Arial"/>
-              </a:defRPr>
-            </a:pPr>
-            <a:r>
-              <a:t>•  AWS EKS: Managed cloud cluster.</a:t>
+                  <a:srgbClr val="FFFFFF"/>
+                </a:solidFill>
+                <a:latin typeface="Arial"/>
+              </a:defRPr>
+            </a:pPr>
+            <a:r>
+              <a:t>•  AWS EKS: Cloud managed cluster.</a:t>
             </a:r>
           </a:p>
         </p:txBody>
@@ -8269,11 +8709,11 @@
             <a:avLst/>
           </a:prstGeom>
           <a:solidFill>
-            <a:srgbClr val="1E293B"/>
+            <a:srgbClr val="141B2D"/>
           </a:solidFill>
           <a:ln w="19050">
             <a:solidFill>
-              <a:srgbClr val="334155"/>
+              <a:srgbClr val="2D374B"/>
             </a:solidFill>
           </a:ln>
         </p:spPr>
@@ -8307,8 +8747,8 @@
         </p:nvSpPr>
         <p:spPr>
           <a:xfrm>
-            <a:off x="9052560" y="1645920"/>
-            <a:ext cx="2011680" cy="4023360"/>
+            <a:off x="9052560" y="1627632"/>
+            <a:ext cx="2011680" cy="4059936"/>
           </a:xfrm>
           <a:prstGeom prst="rect">
             <a:avLst/>
@@ -8333,7 +8773,7 @@
               </a:defRPr>
             </a:pPr>
             <a:r>
-              <a:t>Security &amp; Ops</a:t>
+              <a:t>Security &amp; Telemetry</a:t>
             </a:r>
           </a:p>
           <a:p>
@@ -8343,13 +8783,13 @@
               </a:spcAft>
               <a:defRPr sz="1300">
                 <a:solidFill>
-                  <a:srgbClr val="F8FAFC"/>
-                </a:solidFill>
-                <a:latin typeface="Arial"/>
-              </a:defRPr>
-            </a:pPr>
-            <a:r>
-              <a:t>•  GitHub Actions: Automated CI/CD.</a:t>
+                  <a:srgbClr val="FFFFFF"/>
+                </a:solidFill>
+                <a:latin typeface="Arial"/>
+              </a:defRPr>
+            </a:pPr>
+            <a:r>
+              <a:t>•  GitHub Actions: 5-stage CI/CD.</a:t>
             </a:r>
           </a:p>
           <a:p>
@@ -8359,13 +8799,13 @@
               </a:spcAft>
               <a:defRPr sz="1300">
                 <a:solidFill>
-                  <a:srgbClr val="F8FAFC"/>
-                </a:solidFill>
-                <a:latin typeface="Arial"/>
-              </a:defRPr>
-            </a:pPr>
-            <a:r>
-              <a:t>•  Trivy: DevSecOps CVE security scan.</a:t>
+                  <a:srgbClr val="FFFFFF"/>
+                </a:solidFill>
+                <a:latin typeface="Arial"/>
+              </a:defRPr>
+            </a:pPr>
+            <a:r>
+              <a:t>•  Trivy: Automated CVE scan.</a:t>
             </a:r>
           </a:p>
           <a:p>
@@ -8375,13 +8815,13 @@
               </a:spcAft>
               <a:defRPr sz="1300">
                 <a:solidFill>
-                  <a:srgbClr val="F8FAFC"/>
-                </a:solidFill>
-                <a:latin typeface="Arial"/>
-              </a:defRPr>
-            </a:pPr>
-            <a:r>
-              <a:t>•  Prometheus: Real-time telemetry.</a:t>
+                  <a:srgbClr val="FFFFFF"/>
+                </a:solidFill>
+                <a:latin typeface="Arial"/>
+              </a:defRPr>
+            </a:pPr>
+            <a:r>
+              <a:t>•  Prometheus: Latency &amp; RPS metrics.</a:t>
             </a:r>
           </a:p>
           <a:p>
@@ -8391,13 +8831,13 @@
               </a:spcAft>
               <a:defRPr sz="1300">
                 <a:solidFill>
-                  <a:srgbClr val="F8FAFC"/>
-                </a:solidFill>
-                <a:latin typeface="Arial"/>
-              </a:defRPr>
-            </a:pPr>
-            <a:r>
-              <a:t>•  Terraform: Modular IaC for AWS.</a:t>
+                  <a:srgbClr val="FFFFFF"/>
+                </a:solidFill>
+                <a:latin typeface="Arial"/>
+              </a:defRPr>
+            </a:pPr>
+            <a:r>
+              <a:t>•  Terraform: Modular AWS IaC.</a:t>
             </a:r>
           </a:p>
         </p:txBody>
@@ -8435,7 +8875,7 @@
             <a:avLst/>
           </a:prstGeom>
           <a:solidFill>
-            <a:srgbClr val="0F172A"/>
+            <a:srgbClr val="0B0F19"/>
           </a:solidFill>
           <a:ln>
             <a:noFill/>
@@ -8471,8 +8911,8 @@
         </p:nvSpPr>
         <p:spPr>
           <a:xfrm>
-            <a:off x="731520" y="365760"/>
-            <a:ext cx="7315200" cy="320040"/>
+            <a:off x="731520" y="320040"/>
+            <a:ext cx="10058400" cy="320040"/>
           </a:xfrm>
           <a:prstGeom prst="rect">
             <a:avLst/>
@@ -8480,7 +8920,7 @@
           <a:noFill/>
         </p:spPr>
         <p:txBody>
-          <a:bodyPr wrap="square">
+          <a:bodyPr wrap="none">
             <a:spAutoFit/>
           </a:bodyPr>
           <a:lstStyle/>
@@ -8488,13 +8928,13 @@
             <a:pPr>
               <a:defRPr sz="1100" b="1">
                 <a:solidFill>
-                  <a:srgbClr val="38BDF8"/>
-                </a:solidFill>
-                <a:latin typeface="Arial"/>
-              </a:defRPr>
-            </a:pPr>
-            <a:r>
-              <a:t>05. CONTAINER ORCHESTRATION</a:t>
+                  <a:srgbClr val="FACC15"/>
+                </a:solidFill>
+                <a:latin typeface="Arial"/>
+              </a:defRPr>
+            </a:pPr>
+            <a:r>
+              <a:t>★ MANDATORY PROOF OF CONCEPT  |  05. CONTAINER ORCHESTRATION</a:t>
             </a:r>
           </a:p>
         </p:txBody>
@@ -8507,8 +8947,8 @@
         </p:nvSpPr>
         <p:spPr>
           <a:xfrm>
-            <a:off x="731520" y="640080"/>
-            <a:ext cx="10515600" cy="640080"/>
+            <a:off x="731520" y="621792"/>
+            <a:ext cx="10698480" cy="685800"/>
           </a:xfrm>
           <a:prstGeom prst="rect">
             <a:avLst/>
@@ -8516,7 +8956,7 @@
           <a:noFill/>
         </p:spPr>
         <p:txBody>
-          <a:bodyPr wrap="square">
+          <a:bodyPr wrap="none">
             <a:spAutoFit/>
           </a:bodyPr>
           <a:lstStyle/>
@@ -8524,7 +8964,7 @@
             <a:pPr>
               <a:defRPr sz="2600" b="1">
                 <a:solidFill>
-                  <a:srgbClr val="F8FAFC"/>
+                  <a:srgbClr val="FFFFFF"/>
                 </a:solidFill>
                 <a:latin typeface="Arial"/>
               </a:defRPr>
@@ -8543,14 +8983,14 @@
         </p:nvSpPr>
         <p:spPr>
           <a:xfrm>
-            <a:off x="731520" y="6309360"/>
+            <a:off x="731520" y="6327648"/>
             <a:ext cx="10728655" cy="18288"/>
           </a:xfrm>
           <a:prstGeom prst="rect">
             <a:avLst/>
           </a:prstGeom>
           <a:solidFill>
-            <a:srgbClr val="334155"/>
+            <a:srgbClr val="2D374B"/>
           </a:solidFill>
           <a:ln>
             <a:noFill/>
@@ -8586,7 +9026,7 @@
         </p:nvSpPr>
         <p:spPr>
           <a:xfrm>
-            <a:off x="731520" y="6355080"/>
+            <a:off x="731520" y="6364224"/>
             <a:ext cx="10728655" cy="320040"/>
           </a:xfrm>
           <a:prstGeom prst="rect">
@@ -8603,7 +9043,7 @@
             <a:pPr>
               <a:defRPr sz="1000">
                 <a:solidFill>
-                  <a:srgbClr val="94A3B8"/>
+                  <a:srgbClr val="9CA3AF"/>
                 </a:solidFill>
                 <a:latin typeface="Arial"/>
               </a:defRPr>
@@ -8623,17 +9063,17 @@
         <p:spPr>
           <a:xfrm>
             <a:off x="731520" y="1463040"/>
-            <a:ext cx="4114800" cy="4389120"/>
+            <a:ext cx="3931920" cy="4389120"/>
           </a:xfrm>
           <a:prstGeom prst="roundRect">
             <a:avLst/>
           </a:prstGeom>
           <a:solidFill>
-            <a:srgbClr val="1E293B"/>
+            <a:srgbClr val="141B2D"/>
           </a:solidFill>
           <a:ln w="19050">
             <a:solidFill>
-              <a:srgbClr val="334155"/>
+              <a:srgbClr val="2D374B"/>
             </a:solidFill>
           </a:ln>
         </p:spPr>
@@ -8667,8 +9107,8 @@
         </p:nvSpPr>
         <p:spPr>
           <a:xfrm>
-            <a:off x="960120" y="1645920"/>
-            <a:ext cx="3657600" cy="4023360"/>
+            <a:off x="960120" y="1627632"/>
+            <a:ext cx="3474720" cy="4059936"/>
           </a:xfrm>
           <a:prstGeom prst="rect">
             <a:avLst/>
@@ -8693,7 +9133,7 @@
               </a:defRPr>
             </a:pPr>
             <a:r>
-              <a:t>One Command Local Stack</a:t>
+              <a:t>Single-Command Launch</a:t>
             </a:r>
           </a:p>
           <a:p>
@@ -8703,13 +9143,13 @@
               </a:spcAft>
               <a:defRPr sz="1300">
                 <a:solidFill>
-                  <a:srgbClr val="F8FAFC"/>
-                </a:solidFill>
-                <a:latin typeface="Arial"/>
-              </a:defRPr>
-            </a:pPr>
-            <a:r>
-              <a:t>•  Single command launch: docker compose up -d --build.</a:t>
+                  <a:srgbClr val="FFFFFF"/>
+                </a:solidFill>
+                <a:latin typeface="Arial"/>
+              </a:defRPr>
+            </a:pPr>
+            <a:r>
+              <a:t>•  docker compose up -d builds and runs the entire 3-tier platform.</a:t>
             </a:r>
           </a:p>
           <a:p>
@@ -8719,13 +9159,13 @@
               </a:spcAft>
               <a:defRPr sz="1300">
                 <a:solidFill>
-                  <a:srgbClr val="F8FAFC"/>
-                </a:solidFill>
-                <a:latin typeface="Arial"/>
-              </a:defRPr>
-            </a:pPr>
-            <a:r>
-              <a:t>•  Orchestrates 3 microservices: Database, Backend API, and Web UI.</a:t>
+                  <a:srgbClr val="FFFFFF"/>
+                </a:solidFill>
+                <a:latin typeface="Arial"/>
+              </a:defRPr>
+            </a:pPr>
+            <a:r>
+              <a:t>•  Automatic Healthcheck: Backend waits for PostgreSQL readiness.</a:t>
             </a:r>
           </a:p>
           <a:p>
@@ -8735,13 +9175,13 @@
               </a:spcAft>
               <a:defRPr sz="1300">
                 <a:solidFill>
-                  <a:srgbClr val="F8FAFC"/>
-                </a:solidFill>
-                <a:latin typeface="Arial"/>
-              </a:defRPr>
-            </a:pPr>
-            <a:r>
-              <a:t>•  Built-in healthchecks: Backend waits for PostgreSQL readiness.</a:t>
+                  <a:srgbClr val="FFFFFF"/>
+                </a:solidFill>
+                <a:latin typeface="Arial"/>
+              </a:defRPr>
+            </a:pPr>
+            <a:r>
+              <a:t>•  Isolated bridge network with internal DNS service discovery.</a:t>
             </a:r>
           </a:p>
           <a:p>
@@ -8751,13 +9191,13 @@
               </a:spcAft>
               <a:defRPr sz="1300">
                 <a:solidFill>
-                  <a:srgbClr val="F8FAFC"/>
-                </a:solidFill>
-                <a:latin typeface="Arial"/>
-              </a:defRPr>
-            </a:pPr>
-            <a:r>
-              <a:t>•  Isolated bridge network with automatic service discovery.</a:t>
+                  <a:srgbClr val="FFFFFF"/>
+                </a:solidFill>
+                <a:latin typeface="Arial"/>
+              </a:defRPr>
+            </a:pPr>
+            <a:r>
+              <a:t>•  Security compliance: Containers run as non-root UIDs 10001 and 101.</a:t>
             </a:r>
           </a:p>
         </p:txBody>
@@ -8770,14 +9210,14 @@
         </p:nvSpPr>
         <p:spPr>
           <a:xfrm>
-            <a:off x="5084064" y="1426464"/>
-            <a:ext cx="6382512" cy="4462272"/>
+            <a:off x="4901184" y="1426464"/>
+            <a:ext cx="6565392" cy="2176272"/>
           </a:xfrm>
           <a:prstGeom prst="roundRect">
             <a:avLst/>
           </a:prstGeom>
           <a:solidFill>
-            <a:srgbClr val="334155"/>
+            <a:srgbClr val="2D374B"/>
           </a:solidFill>
           <a:ln>
             <a:noFill/>
@@ -8821,8 +9261,75 @@
         </p:blipFill>
         <p:spPr>
           <a:xfrm>
-            <a:off x="5120640" y="1463040"/>
-            <a:ext cx="6309360" cy="4389120"/>
+            <a:off x="4937760" y="1463040"/>
+            <a:ext cx="6492240" cy="2103120"/>
+          </a:xfrm>
+          <a:prstGeom prst="rect">
+            <a:avLst/>
+          </a:prstGeom>
+        </p:spPr>
+      </p:pic>
+      <p:sp>
+        <p:nvSpPr>
+          <p:cNvPr id="11" name="Rounded Rectangle 10"/>
+          <p:cNvSpPr/>
+          <p:nvPr/>
+        </p:nvSpPr>
+        <p:spPr>
+          <a:xfrm>
+            <a:off x="4901184" y="3712463"/>
+            <a:ext cx="6565392" cy="2176272"/>
+          </a:xfrm>
+          <a:prstGeom prst="roundRect">
+            <a:avLst/>
+          </a:prstGeom>
+          <a:solidFill>
+            <a:srgbClr val="2D374B"/>
+          </a:solidFill>
+          <a:ln>
+            <a:noFill/>
+          </a:ln>
+        </p:spPr>
+        <p:style>
+          <a:lnRef idx="1">
+            <a:schemeClr val="accent1"/>
+          </a:lnRef>
+          <a:fillRef idx="3">
+            <a:schemeClr val="accent1"/>
+          </a:fillRef>
+          <a:effectRef idx="2">
+            <a:schemeClr val="accent1"/>
+          </a:effectRef>
+          <a:fontRef idx="minor">
+            <a:schemeClr val="lt1"/>
+          </a:fontRef>
+        </p:style>
+        <p:txBody>
+          <a:bodyPr rtlCol="0" anchor="ctr"/>
+          <a:lstStyle/>
+          <a:p>
+            <a:pPr algn="ctr"/>
+          </a:p>
+        </p:txBody>
+      </p:sp>
+      <p:pic>
+        <p:nvPicPr>
+          <p:cNvPr id="12" name="Picture 11" descr="m4-nonroot.png"/>
+          <p:cNvPicPr>
+            <a:picLocks noChangeAspect="1"/>
+          </p:cNvPicPr>
+          <p:nvPr/>
+        </p:nvPicPr>
+        <p:blipFill>
+          <a:blip r:embed="rId3"/>
+          <a:stretch>
+            <a:fillRect/>
+          </a:stretch>
+        </p:blipFill>
+        <p:spPr>
+          <a:xfrm>
+            <a:off x="4937760" y="3749039"/>
+            <a:ext cx="6492240" cy="2103120"/>
           </a:xfrm>
           <a:prstGeom prst="rect">
             <a:avLst/>
@@ -8862,7 +9369,7 @@
             <a:avLst/>
           </a:prstGeom>
           <a:solidFill>
-            <a:srgbClr val="0F172A"/>
+            <a:srgbClr val="0B0F19"/>
           </a:solidFill>
           <a:ln>
             <a:noFill/>
@@ -8898,8 +9405,8 @@
         </p:nvSpPr>
         <p:spPr>
           <a:xfrm>
-            <a:off x="731520" y="365760"/>
-            <a:ext cx="7315200" cy="320040"/>
+            <a:off x="731520" y="320040"/>
+            <a:ext cx="10058400" cy="320040"/>
           </a:xfrm>
           <a:prstGeom prst="rect">
             <a:avLst/>
@@ -8907,7 +9414,7 @@
           <a:noFill/>
         </p:spPr>
         <p:txBody>
-          <a:bodyPr wrap="square">
+          <a:bodyPr wrap="none">
             <a:spAutoFit/>
           </a:bodyPr>
           <a:lstStyle/>
@@ -8934,8 +9441,8 @@
         </p:nvSpPr>
         <p:spPr>
           <a:xfrm>
-            <a:off x="731520" y="640080"/>
-            <a:ext cx="10515600" cy="640080"/>
+            <a:off x="731520" y="621792"/>
+            <a:ext cx="10698480" cy="685800"/>
           </a:xfrm>
           <a:prstGeom prst="rect">
             <a:avLst/>
@@ -8943,7 +9450,7 @@
           <a:noFill/>
         </p:spPr>
         <p:txBody>
-          <a:bodyPr wrap="square">
+          <a:bodyPr wrap="none">
             <a:spAutoFit/>
           </a:bodyPr>
           <a:lstStyle/>
@@ -8951,13 +9458,13 @@
             <a:pPr>
               <a:defRPr sz="2600" b="1">
                 <a:solidFill>
-                  <a:srgbClr val="F8FAFC"/>
-                </a:solidFill>
-                <a:latin typeface="Arial"/>
-              </a:defRPr>
-            </a:pPr>
-            <a:r>
-              <a:t>Why We Built It This Way: Core Design Principles</a:t>
+                  <a:srgbClr val="FFFFFF"/>
+                </a:solidFill>
+                <a:latin typeface="Arial"/>
+              </a:defRPr>
+            </a:pPr>
+            <a:r>
+              <a:t>Why We Built It This Way: Reliability &amp; Safety First</a:t>
             </a:r>
           </a:p>
         </p:txBody>
@@ -8970,14 +9477,14 @@
         </p:nvSpPr>
         <p:spPr>
           <a:xfrm>
-            <a:off x="731520" y="6309360"/>
+            <a:off x="731520" y="6327648"/>
             <a:ext cx="10728655" cy="18288"/>
           </a:xfrm>
           <a:prstGeom prst="rect">
             <a:avLst/>
           </a:prstGeom>
           <a:solidFill>
-            <a:srgbClr val="334155"/>
+            <a:srgbClr val="2D374B"/>
           </a:solidFill>
           <a:ln>
             <a:noFill/>
@@ -9013,7 +9520,7 @@
         </p:nvSpPr>
         <p:spPr>
           <a:xfrm>
-            <a:off x="731520" y="6355080"/>
+            <a:off x="731520" y="6364224"/>
             <a:ext cx="10728655" cy="320040"/>
           </a:xfrm>
           <a:prstGeom prst="rect">
@@ -9030,7 +9537,7 @@
             <a:pPr>
               <a:defRPr sz="1000">
                 <a:solidFill>
-                  <a:srgbClr val="94A3B8"/>
+                  <a:srgbClr val="9CA3AF"/>
                 </a:solidFill>
                 <a:latin typeface="Arial"/>
               </a:defRPr>
@@ -9056,11 +9563,11 @@
             <a:avLst/>
           </a:prstGeom>
           <a:solidFill>
-            <a:srgbClr val="1E293B"/>
+            <a:srgbClr val="141B2D"/>
           </a:solidFill>
           <a:ln w="19050">
             <a:solidFill>
-              <a:srgbClr val="334155"/>
+              <a:srgbClr val="2D374B"/>
             </a:solidFill>
           </a:ln>
         </p:spPr>
@@ -9094,8 +9601,8 @@
         </p:nvSpPr>
         <p:spPr>
           <a:xfrm>
-            <a:off x="960120" y="1645920"/>
-            <a:ext cx="2871216" cy="4023360"/>
+            <a:off x="960120" y="1627632"/>
+            <a:ext cx="2871216" cy="4059936"/>
           </a:xfrm>
           <a:prstGeom prst="rect">
             <a:avLst/>
@@ -9130,13 +9637,13 @@
               </a:spcAft>
               <a:defRPr sz="1300">
                 <a:solidFill>
-                  <a:srgbClr val="F8FAFC"/>
-                </a:solidFill>
-                <a:latin typeface="Arial"/>
-              </a:defRPr>
-            </a:pPr>
-            <a:r>
-              <a:t>•  If a server pod crashes, Kubernetes restarts it automatically.</a:t>
+                  <a:srgbClr val="FFFFFF"/>
+                </a:solidFill>
+                <a:latin typeface="Arial"/>
+              </a:defRPr>
+            </a:pPr>
+            <a:r>
+              <a:t>•  Kubernetes liveness probes detect deadlocks and restart pods instantly.</a:t>
             </a:r>
           </a:p>
           <a:p>
@@ -9146,13 +9653,13 @@
               </a:spcAft>
               <a:defRPr sz="1300">
                 <a:solidFill>
-                  <a:srgbClr val="F8FAFC"/>
-                </a:solidFill>
-                <a:latin typeface="Arial"/>
-              </a:defRPr>
-            </a:pPr>
-            <a:r>
-              <a:t>•  Health probes ensure traffic is never sent to a broken service.</a:t>
+                  <a:srgbClr val="FFFFFF"/>
+                </a:solidFill>
+                <a:latin typeface="Arial"/>
+              </a:defRPr>
+            </a:pPr>
+            <a:r>
+              <a:t>•  Readiness probes ensure zero traffic is sent to initializing containers.</a:t>
             </a:r>
           </a:p>
           <a:p>
@@ -9162,13 +9669,13 @@
               </a:spcAft>
               <a:defRPr sz="1300">
                 <a:solidFill>
-                  <a:srgbClr val="F8FAFC"/>
-                </a:solidFill>
-                <a:latin typeface="Arial"/>
-              </a:defRPr>
-            </a:pPr>
-            <a:r>
-              <a:t>•  Eliminates late-night manual server reboot panics.</a:t>
+                  <a:srgbClr val="FFFFFF"/>
+                </a:solidFill>
+                <a:latin typeface="Arial"/>
+              </a:defRPr>
+            </a:pPr>
+            <a:r>
+              <a:t>•  Zero downtime rolling updates during application deployments.</a:t>
             </a:r>
           </a:p>
         </p:txBody>
@@ -9188,11 +9695,11 @@
             <a:avLst/>
           </a:prstGeom>
           <a:solidFill>
-            <a:srgbClr val="1E293B"/>
+            <a:srgbClr val="141B2D"/>
           </a:solidFill>
           <a:ln w="19050">
             <a:solidFill>
-              <a:srgbClr val="334155"/>
+              <a:srgbClr val="2D374B"/>
             </a:solidFill>
           </a:ln>
         </p:spPr>
@@ -9226,8 +9733,8 @@
         </p:nvSpPr>
         <p:spPr>
           <a:xfrm>
-            <a:off x="4654296" y="1645920"/>
-            <a:ext cx="2871216" cy="4023360"/>
+            <a:off x="4654296" y="1627632"/>
+            <a:ext cx="2871216" cy="4059936"/>
           </a:xfrm>
           <a:prstGeom prst="rect">
             <a:avLst/>
@@ -9252,7 +9759,7 @@
               </a:defRPr>
             </a:pPr>
             <a:r>
-              <a:t>Data Integrity Guaranteed</a:t>
+              <a:t>Zero Inventory Desynchronization</a:t>
             </a:r>
           </a:p>
           <a:p>
@@ -9262,13 +9769,13 @@
               </a:spcAft>
               <a:defRPr sz="1300">
                 <a:solidFill>
-                  <a:srgbClr val="F8FAFC"/>
-                </a:solidFill>
-                <a:latin typeface="Arial"/>
-              </a:defRPr>
-            </a:pPr>
-            <a:r>
-              <a:t>•  Inventory data cannot afford double-allocation bugs.</a:t>
+                  <a:srgbClr val="FFFFFF"/>
+                </a:solidFill>
+                <a:latin typeface="Arial"/>
+              </a:defRPr>
+            </a:pPr>
+            <a:r>
+              <a:t>•  Warehouse systems cannot afford phantom stock deduction bugs.</a:t>
             </a:r>
           </a:p>
           <a:p>
@@ -9278,13 +9785,13 @@
               </a:spcAft>
               <a:defRPr sz="1300">
                 <a:solidFill>
-                  <a:srgbClr val="F8FAFC"/>
-                </a:solidFill>
-                <a:latin typeface="Arial"/>
-              </a:defRPr>
-            </a:pPr>
-            <a:r>
-              <a:t>•  PostgreSQL ACID transactions guarantee absolute stock balance.</a:t>
+                  <a:srgbClr val="FFFFFF"/>
+                </a:solidFill>
+                <a:latin typeface="Arial"/>
+              </a:defRPr>
+            </a:pPr>
+            <a:r>
+              <a:t>•  PostgreSQL row locking prevents race conditions under high concurrent orders.</a:t>
             </a:r>
           </a:p>
           <a:p>
@@ -9294,13 +9801,13 @@
               </a:spcAft>
               <a:defRPr sz="1300">
                 <a:solidFill>
-                  <a:srgbClr val="F8FAFC"/>
-                </a:solidFill>
-                <a:latin typeface="Arial"/>
-              </a:defRPr>
-            </a:pPr>
-            <a:r>
-              <a:t>•  Strict relational schemas prevent accidental data corruption.</a:t>
+                  <a:srgbClr val="FFFFFF"/>
+                </a:solidFill>
+                <a:latin typeface="Arial"/>
+              </a:defRPr>
+            </a:pPr>
+            <a:r>
+              <a:t>•  Strict relational integrity ensures every SKU maps to a real item.</a:t>
             </a:r>
           </a:p>
         </p:txBody>
@@ -9320,11 +9827,11 @@
             <a:avLst/>
           </a:prstGeom>
           <a:solidFill>
-            <a:srgbClr val="1E293B"/>
+            <a:srgbClr val="141B2D"/>
           </a:solidFill>
           <a:ln w="19050">
             <a:solidFill>
-              <a:srgbClr val="334155"/>
+              <a:srgbClr val="2D374B"/>
             </a:solidFill>
           </a:ln>
         </p:spPr>
@@ -9358,8 +9865,8 @@
         </p:nvSpPr>
         <p:spPr>
           <a:xfrm>
-            <a:off x="8348472" y="1645920"/>
-            <a:ext cx="2871216" cy="4023360"/>
+            <a:off x="8348472" y="1627632"/>
+            <a:ext cx="2871216" cy="4059936"/>
           </a:xfrm>
           <a:prstGeom prst="rect">
             <a:avLst/>
@@ -9378,13 +9885,13 @@
               </a:spcAft>
               <a:defRPr sz="1700" b="1">
                 <a:solidFill>
-                  <a:srgbClr val="FBBF24"/>
-                </a:solidFill>
-                <a:latin typeface="Arial"/>
-              </a:defRPr>
-            </a:pPr>
-            <a:r>
-              <a:t>Security &amp; Least Privilege</a:t>
+                  <a:srgbClr val="FACC15"/>
+                </a:solidFill>
+                <a:latin typeface="Arial"/>
+              </a:defRPr>
+            </a:pPr>
+            <a:r>
+              <a:t>Defense in Depth Security</a:t>
             </a:r>
           </a:p>
           <a:p>
@@ -9394,13 +9901,13 @@
               </a:spcAft>
               <a:defRPr sz="1300">
                 <a:solidFill>
-                  <a:srgbClr val="F8FAFC"/>
-                </a:solidFill>
-                <a:latin typeface="Arial"/>
-              </a:defRPr>
-            </a:pPr>
-            <a:r>
-              <a:t>•  Containers execute as non-root users to block privilege escalation.</a:t>
+                  <a:srgbClr val="FFFFFF"/>
+                </a:solidFill>
+                <a:latin typeface="Arial"/>
+              </a:defRPr>
+            </a:pPr>
+            <a:r>
+              <a:t>•  Containers execute as non-root users to block privilege escalations.</a:t>
             </a:r>
           </a:p>
           <a:p>
@@ -9410,13 +9917,13 @@
               </a:spcAft>
               <a:defRPr sz="1300">
                 <a:solidFill>
-                  <a:srgbClr val="F8FAFC"/>
-                </a:solidFill>
-                <a:latin typeface="Arial"/>
-              </a:defRPr>
-            </a:pPr>
-            <a:r>
-              <a:t>•  Every container image scanned for vulnerabilities before release.</a:t>
+                  <a:srgbClr val="FFFFFF"/>
+                </a:solidFill>
+                <a:latin typeface="Arial"/>
+              </a:defRPr>
+            </a:pPr>
+            <a:r>
+              <a:t>•  Aqua Security Trivy automated scans gate every container image release.</a:t>
             </a:r>
           </a:p>
           <a:p>
@@ -9426,7 +9933,7 @@
               </a:spcAft>
               <a:defRPr sz="1300">
                 <a:solidFill>
-                  <a:srgbClr val="F8FAFC"/>
+                  <a:srgbClr val="FFFFFF"/>
                 </a:solidFill>
                 <a:latin typeface="Arial"/>
               </a:defRPr>
@@ -9470,7 +9977,7 @@
             <a:avLst/>
           </a:prstGeom>
           <a:solidFill>
-            <a:srgbClr val="0F172A"/>
+            <a:srgbClr val="0B0F19"/>
           </a:solidFill>
           <a:ln>
             <a:noFill/>
@@ -9506,8 +10013,8 @@
         </p:nvSpPr>
         <p:spPr>
           <a:xfrm>
-            <a:off x="731520" y="365760"/>
-            <a:ext cx="7315200" cy="320040"/>
+            <a:off x="731520" y="320040"/>
+            <a:ext cx="10058400" cy="320040"/>
           </a:xfrm>
           <a:prstGeom prst="rect">
             <a:avLst/>
@@ -9515,7 +10022,7 @@
           <a:noFill/>
         </p:spPr>
         <p:txBody>
-          <a:bodyPr wrap="square">
+          <a:bodyPr wrap="none">
             <a:spAutoFit/>
           </a:bodyPr>
           <a:lstStyle/>
@@ -9542,8 +10049,8 @@
         </p:nvSpPr>
         <p:spPr>
           <a:xfrm>
-            <a:off x="731520" y="640080"/>
-            <a:ext cx="10515600" cy="640080"/>
+            <a:off x="731520" y="621792"/>
+            <a:ext cx="10698480" cy="685800"/>
           </a:xfrm>
           <a:prstGeom prst="rect">
             <a:avLst/>
@@ -9551,7 +10058,7 @@
           <a:noFill/>
         </p:spPr>
         <p:txBody>
-          <a:bodyPr wrap="square">
+          <a:bodyPr wrap="none">
             <a:spAutoFit/>
           </a:bodyPr>
           <a:lstStyle/>
@@ -9559,7 +10066,7 @@
             <a:pPr>
               <a:defRPr sz="2600" b="1">
                 <a:solidFill>
-                  <a:srgbClr val="F8FAFC"/>
+                  <a:srgbClr val="FFFFFF"/>
                 </a:solidFill>
                 <a:latin typeface="Arial"/>
               </a:defRPr>
@@ -9578,14 +10085,14 @@
         </p:nvSpPr>
         <p:spPr>
           <a:xfrm>
-            <a:off x="731520" y="6309360"/>
+            <a:off x="731520" y="6327648"/>
             <a:ext cx="10728655" cy="18288"/>
           </a:xfrm>
           <a:prstGeom prst="rect">
             <a:avLst/>
           </a:prstGeom>
           <a:solidFill>
-            <a:srgbClr val="334155"/>
+            <a:srgbClr val="2D374B"/>
           </a:solidFill>
           <a:ln>
             <a:noFill/>
@@ -9621,7 +10128,7 @@
         </p:nvSpPr>
         <p:spPr>
           <a:xfrm>
-            <a:off x="731520" y="6355080"/>
+            <a:off x="731520" y="6364224"/>
             <a:ext cx="10728655" cy="320040"/>
           </a:xfrm>
           <a:prstGeom prst="rect">
@@ -9638,7 +10145,7 @@
             <a:pPr>
               <a:defRPr sz="1000">
                 <a:solidFill>
-                  <a:srgbClr val="94A3B8"/>
+                  <a:srgbClr val="9CA3AF"/>
                 </a:solidFill>
                 <a:latin typeface="Arial"/>
               </a:defRPr>
@@ -9664,11 +10171,11 @@
             <a:avLst/>
           </a:prstGeom>
           <a:solidFill>
-            <a:srgbClr val="1E293B"/>
+            <a:srgbClr val="141B2D"/>
           </a:solidFill>
           <a:ln w="19050">
             <a:solidFill>
-              <a:srgbClr val="334155"/>
+              <a:srgbClr val="2D374B"/>
             </a:solidFill>
           </a:ln>
         </p:spPr>
@@ -9702,8 +10209,8 @@
         </p:nvSpPr>
         <p:spPr>
           <a:xfrm>
-            <a:off x="960120" y="1645920"/>
-            <a:ext cx="4663440" cy="1691640"/>
+            <a:off x="960120" y="1627632"/>
+            <a:ext cx="4663440" cy="1728216"/>
           </a:xfrm>
           <a:prstGeom prst="rect">
             <a:avLst/>
@@ -9738,13 +10245,13 @@
               </a:spcAft>
               <a:defRPr sz="1300">
                 <a:solidFill>
-                  <a:srgbClr val="F8FAFC"/>
-                </a:solidFill>
-                <a:latin typeface="Arial"/>
-              </a:defRPr>
-            </a:pPr>
-            <a:r>
-              <a:t>•  Chose Kubernetes: Industry standard, vendor-neutral, advanced autoscaling.</a:t>
+                  <a:srgbClr val="FFFFFF"/>
+                </a:solidFill>
+                <a:latin typeface="Arial"/>
+              </a:defRPr>
+            </a:pPr>
+            <a:r>
+              <a:t>•  Chose Kubernetes: Declarative self-healing, HPA autoscaling, open standard.</a:t>
             </a:r>
           </a:p>
           <a:p>
@@ -9754,13 +10261,13 @@
               </a:spcAft>
               <a:defRPr sz="1300">
                 <a:solidFill>
-                  <a:srgbClr val="F8FAFC"/>
-                </a:solidFill>
-                <a:latin typeface="Arial"/>
-              </a:defRPr>
-            </a:pPr>
-            <a:r>
-              <a:t>•  Alternative Rejected: AWS ECS locks you to Amazon; Swarm lacks autoscaling ecosystem.</a:t>
+                  <a:srgbClr val="FFFFFF"/>
+                </a:solidFill>
+                <a:latin typeface="Arial"/>
+              </a:defRPr>
+            </a:pPr>
+            <a:r>
+              <a:t>•  Alternative Rejected: AWS ECS locks to Amazon; Swarm lacks autoscaling tooling.</a:t>
             </a:r>
           </a:p>
         </p:txBody>
@@ -9780,11 +10287,11 @@
             <a:avLst/>
           </a:prstGeom>
           <a:solidFill>
-            <a:srgbClr val="1E293B"/>
+            <a:srgbClr val="141B2D"/>
           </a:solidFill>
           <a:ln w="19050">
             <a:solidFill>
-              <a:srgbClr val="334155"/>
+              <a:srgbClr val="2D374B"/>
             </a:solidFill>
           </a:ln>
         </p:spPr>
@@ -9818,8 +10325,8 @@
         </p:nvSpPr>
         <p:spPr>
           <a:xfrm>
-            <a:off x="6446520" y="1645920"/>
-            <a:ext cx="4663440" cy="1691640"/>
+            <a:off x="6446520" y="1627632"/>
+            <a:ext cx="4663440" cy="1728216"/>
           </a:xfrm>
           <a:prstGeom prst="rect">
             <a:avLst/>
@@ -9854,13 +10361,13 @@
               </a:spcAft>
               <a:defRPr sz="1300">
                 <a:solidFill>
-                  <a:srgbClr val="F8FAFC"/>
-                </a:solidFill>
-                <a:latin typeface="Arial"/>
-              </a:defRPr>
-            </a:pPr>
-            <a:r>
-              <a:t>•  Chose FastAPI: High-speed async I/O, Pydantic type safety, auto-generated Swagger.</a:t>
+                  <a:srgbClr val="FFFFFF"/>
+                </a:solidFill>
+                <a:latin typeface="Arial"/>
+              </a:defRPr>
+            </a:pPr>
+            <a:r>
+              <a:t>•  Chose FastAPI: High-speed async ASGI, Pydantic validation, auto Swagger docs.</a:t>
             </a:r>
           </a:p>
           <a:p>
@@ -9870,13 +10377,13 @@
               </a:spcAft>
               <a:defRPr sz="1300">
                 <a:solidFill>
-                  <a:srgbClr val="F8FAFC"/>
-                </a:solidFill>
-                <a:latin typeface="Arial"/>
-              </a:defRPr>
-            </a:pPr>
-            <a:r>
-              <a:t>•  Alternative Rejected: Django is too heavy for microservices; Flask lacks native async.</a:t>
+                  <a:srgbClr val="FFFFFF"/>
+                </a:solidFill>
+                <a:latin typeface="Arial"/>
+              </a:defRPr>
+            </a:pPr>
+            <a:r>
+              <a:t>•  Alternative Rejected: Django is too heavy for microservices; Flask lacks async.</a:t>
             </a:r>
           </a:p>
         </p:txBody>
@@ -9896,11 +10403,11 @@
             <a:avLst/>
           </a:prstGeom>
           <a:solidFill>
-            <a:srgbClr val="1E293B"/>
+            <a:srgbClr val="141B2D"/>
           </a:solidFill>
           <a:ln w="19050">
             <a:solidFill>
-              <a:srgbClr val="334155"/>
+              <a:srgbClr val="2D374B"/>
             </a:solidFill>
           </a:ln>
         </p:spPr>
@@ -9934,8 +10441,8 @@
         </p:nvSpPr>
         <p:spPr>
           <a:xfrm>
-            <a:off x="960120" y="3977640"/>
-            <a:ext cx="4663440" cy="1691640"/>
+            <a:off x="960120" y="3959352"/>
+            <a:ext cx="4663440" cy="1728216"/>
           </a:xfrm>
           <a:prstGeom prst="rect">
             <a:avLst/>
@@ -9954,7 +10461,7 @@
               </a:spcAft>
               <a:defRPr sz="1700" b="1">
                 <a:solidFill>
-                  <a:srgbClr val="FBBF24"/>
+                  <a:srgbClr val="FACC15"/>
                 </a:solidFill>
                 <a:latin typeface="Arial"/>
               </a:defRPr>
@@ -9970,7 +10477,7 @@
               </a:spcAft>
               <a:defRPr sz="1300">
                 <a:solidFill>
-                  <a:srgbClr val="F8FAFC"/>
+                  <a:srgbClr val="FFFFFF"/>
                 </a:solidFill>
                 <a:latin typeface="Arial"/>
               </a:defRPr>
@@ -9986,7 +10493,7 @@
               </a:spcAft>
               <a:defRPr sz="1300">
                 <a:solidFill>
-                  <a:srgbClr val="F8FAFC"/>
+                  <a:srgbClr val="FFFFFF"/>
                 </a:solidFill>
                 <a:latin typeface="Arial"/>
               </a:defRPr>
@@ -10012,11 +10519,11 @@
             <a:avLst/>
           </a:prstGeom>
           <a:solidFill>
-            <a:srgbClr val="1E293B"/>
+            <a:srgbClr val="141B2D"/>
           </a:solidFill>
           <a:ln w="19050">
             <a:solidFill>
-              <a:srgbClr val="334155"/>
+              <a:srgbClr val="2D374B"/>
             </a:solidFill>
           </a:ln>
         </p:spPr>
@@ -10050,8 +10557,8 @@
         </p:nvSpPr>
         <p:spPr>
           <a:xfrm>
-            <a:off x="6446520" y="3977640"/>
-            <a:ext cx="4663440" cy="1691640"/>
+            <a:off x="6446520" y="3959352"/>
+            <a:ext cx="4663440" cy="1728216"/>
           </a:xfrm>
           <a:prstGeom prst="rect">
             <a:avLst/>
@@ -10086,13 +10593,13 @@
               </a:spcAft>
               <a:defRPr sz="1300">
                 <a:solidFill>
-                  <a:srgbClr val="F8FAFC"/>
-                </a:solidFill>
-                <a:latin typeface="Arial"/>
-              </a:defRPr>
-            </a:pPr>
-            <a:r>
-              <a:t>•  Chose GitHub Actions: Cloud-native, zero server maintenance, integrated security.</a:t>
+                  <a:srgbClr val="FFFFFF"/>
+                </a:solidFill>
+                <a:latin typeface="Arial"/>
+              </a:defRPr>
+            </a:pPr>
+            <a:r>
+              <a:t>•  Chose GitHub Actions: Serverless cloud runners, native GHCR, zero server upkeep.</a:t>
             </a:r>
           </a:p>
           <a:p>
@@ -10102,13 +10609,13 @@
               </a:spcAft>
               <a:defRPr sz="1300">
                 <a:solidFill>
-                  <a:srgbClr val="F8FAFC"/>
-                </a:solidFill>
-                <a:latin typeface="Arial"/>
-              </a:defRPr>
-            </a:pPr>
-            <a:r>
-              <a:t>•  Alternative Rejected: Jenkins requires maintaining dedicated controller VMs and plugins.</a:t>
+                  <a:srgbClr val="FFFFFF"/>
+                </a:solidFill>
+                <a:latin typeface="Arial"/>
+              </a:defRPr>
+            </a:pPr>
+            <a:r>
+              <a:t>•  Alternative Rejected: Jenkins requires maintaining dedicated master/worker VMs.</a:t>
             </a:r>
           </a:p>
         </p:txBody>
@@ -10146,7 +10653,7 @@
             <a:avLst/>
           </a:prstGeom>
           <a:solidFill>
-            <a:srgbClr val="0F172A"/>
+            <a:srgbClr val="0B0F19"/>
           </a:solidFill>
           <a:ln>
             <a:noFill/>
@@ -10182,8 +10689,8 @@
         </p:nvSpPr>
         <p:spPr>
           <a:xfrm>
-            <a:off x="731520" y="365760"/>
-            <a:ext cx="7315200" cy="320040"/>
+            <a:off x="731520" y="320040"/>
+            <a:ext cx="10058400" cy="320040"/>
           </a:xfrm>
           <a:prstGeom prst="rect">
             <a:avLst/>
@@ -10191,7 +10698,7 @@
           <a:noFill/>
         </p:spPr>
         <p:txBody>
-          <a:bodyPr wrap="square">
+          <a:bodyPr wrap="none">
             <a:spAutoFit/>
           </a:bodyPr>
           <a:lstStyle/>
@@ -10199,13 +10706,13 @@
             <a:pPr>
               <a:defRPr sz="1100" b="1">
                 <a:solidFill>
-                  <a:srgbClr val="38BDF8"/>
-                </a:solidFill>
-                <a:latin typeface="Arial"/>
-              </a:defRPr>
-            </a:pPr>
-            <a:r>
-              <a:t>08. CONTINUOUS INTEGRATION &amp; DELIVERY</a:t>
+                  <a:srgbClr val="FACC15"/>
+                </a:solidFill>
+                <a:latin typeface="Arial"/>
+              </a:defRPr>
+            </a:pPr>
+            <a:r>
+              <a:t>★ MANDATORY PROOF OF CONCEPT  |  08. CONTINUOUS INTEGRATION &amp; DELIVERY</a:t>
             </a:r>
           </a:p>
         </p:txBody>
@@ -10218,8 +10725,8 @@
         </p:nvSpPr>
         <p:spPr>
           <a:xfrm>
-            <a:off x="731520" y="640080"/>
-            <a:ext cx="10515600" cy="640080"/>
+            <a:off x="731520" y="621792"/>
+            <a:ext cx="10698480" cy="685800"/>
           </a:xfrm>
           <a:prstGeom prst="rect">
             <a:avLst/>
@@ -10227,7 +10734,7 @@
           <a:noFill/>
         </p:spPr>
         <p:txBody>
-          <a:bodyPr wrap="square">
+          <a:bodyPr wrap="none">
             <a:spAutoFit/>
           </a:bodyPr>
           <a:lstStyle/>
@@ -10235,7 +10742,7 @@
             <a:pPr>
               <a:defRPr sz="2600" b="1">
                 <a:solidFill>
-                  <a:srgbClr val="F8FAFC"/>
+                  <a:srgbClr val="FFFFFF"/>
                 </a:solidFill>
                 <a:latin typeface="Arial"/>
               </a:defRPr>
@@ -10254,14 +10761,14 @@
         </p:nvSpPr>
         <p:spPr>
           <a:xfrm>
-            <a:off x="731520" y="6309360"/>
+            <a:off x="731520" y="6327648"/>
             <a:ext cx="10728655" cy="18288"/>
           </a:xfrm>
           <a:prstGeom prst="rect">
             <a:avLst/>
           </a:prstGeom>
           <a:solidFill>
-            <a:srgbClr val="334155"/>
+            <a:srgbClr val="2D374B"/>
           </a:solidFill>
           <a:ln>
             <a:noFill/>
@@ -10297,7 +10804,7 @@
         </p:nvSpPr>
         <p:spPr>
           <a:xfrm>
-            <a:off x="731520" y="6355080"/>
+            <a:off x="731520" y="6364224"/>
             <a:ext cx="10728655" cy="320040"/>
           </a:xfrm>
           <a:prstGeom prst="rect">
@@ -10314,7 +10821,7 @@
             <a:pPr>
               <a:defRPr sz="1000">
                 <a:solidFill>
-                  <a:srgbClr val="94A3B8"/>
+                  <a:srgbClr val="9CA3AF"/>
                 </a:solidFill>
                 <a:latin typeface="Arial"/>
               </a:defRPr>
@@ -10334,17 +10841,17 @@
         <p:spPr>
           <a:xfrm>
             <a:off x="731520" y="1463040"/>
-            <a:ext cx="4114800" cy="4389120"/>
+            <a:ext cx="3931920" cy="4389120"/>
           </a:xfrm>
           <a:prstGeom prst="roundRect">
             <a:avLst/>
           </a:prstGeom>
           <a:solidFill>
-            <a:srgbClr val="1E293B"/>
+            <a:srgbClr val="141B2D"/>
           </a:solidFill>
           <a:ln w="19050">
             <a:solidFill>
-              <a:srgbClr val="334155"/>
+              <a:srgbClr val="2D374B"/>
             </a:solidFill>
           </a:ln>
         </p:spPr>
@@ -10378,8 +10885,8 @@
         </p:nvSpPr>
         <p:spPr>
           <a:xfrm>
-            <a:off x="960120" y="1645920"/>
-            <a:ext cx="3657600" cy="4023360"/>
+            <a:off x="960120" y="1627632"/>
+            <a:ext cx="3474720" cy="4059936"/>
           </a:xfrm>
           <a:prstGeom prst="rect">
             <a:avLst/>
@@ -10404,7 +10911,7 @@
               </a:defRPr>
             </a:pPr>
             <a:r>
-              <a:t>Automated Quality Gates</a:t>
+              <a:t>5 Automated Quality Gates</a:t>
             </a:r>
           </a:p>
           <a:p>
@@ -10414,13 +10921,13 @@
               </a:spcAft>
               <a:defRPr sz="1300">
                 <a:solidFill>
-                  <a:srgbClr val="F8FAFC"/>
-                </a:solidFill>
-                <a:latin typeface="Arial"/>
-              </a:defRPr>
-            </a:pPr>
-            <a:r>
-              <a:t>•  5 green stages executed on every commit to main.</a:t>
+                  <a:srgbClr val="FFFFFF"/>
+                </a:solidFill>
+                <a:latin typeface="Arial"/>
+              </a:defRPr>
+            </a:pPr>
+            <a:r>
+              <a:t>•  Triggered automatically on every push and pull request to main.</a:t>
             </a:r>
           </a:p>
           <a:p>
@@ -10430,13 +10937,13 @@
               </a:spcAft>
               <a:defRPr sz="1300">
                 <a:solidFill>
-                  <a:srgbClr val="F8FAFC"/>
-                </a:solidFill>
-                <a:latin typeface="Arial"/>
-              </a:defRPr>
-            </a:pPr>
-            <a:r>
-              <a:t>•  Unit testing: Automated Pytest run validates business rules.</a:t>
+                  <a:srgbClr val="FFFFFF"/>
+                </a:solidFill>
+                <a:latin typeface="Arial"/>
+              </a:defRPr>
+            </a:pPr>
+            <a:r>
+              <a:t>•  1. Test: Pytest executes 11 unit &amp; integration tests.</a:t>
             </a:r>
           </a:p>
           <a:p>
@@ -10446,13 +10953,13 @@
               </a:spcAft>
               <a:defRPr sz="1300">
                 <a:solidFill>
-                  <a:srgbClr val="F8FAFC"/>
-                </a:solidFill>
-                <a:latin typeface="Arial"/>
-              </a:defRPr>
-            </a:pPr>
-            <a:r>
-              <a:t>•  Security gate: Trivy scans Docker images for CVEs before push.</a:t>
+                  <a:srgbClr val="FFFFFF"/>
+                </a:solidFill>
+                <a:latin typeface="Arial"/>
+              </a:defRPr>
+            </a:pPr>
+            <a:r>
+              <a:t>•  2. Build: Multi-stage Docker build for backend and frontend.</a:t>
             </a:r>
           </a:p>
           <a:p>
@@ -10462,13 +10969,45 @@
               </a:spcAft>
               <a:defRPr sz="1300">
                 <a:solidFill>
-                  <a:srgbClr val="F8FAFC"/>
-                </a:solidFill>
-                <a:latin typeface="Arial"/>
-              </a:defRPr>
-            </a:pPr>
-            <a:r>
-              <a:t>•  Zero manual intervention: Code automatically built and published.</a:t>
+                  <a:srgbClr val="FFFFFF"/>
+                </a:solidFill>
+                <a:latin typeface="Arial"/>
+              </a:defRPr>
+            </a:pPr>
+            <a:r>
+              <a:t>•  3. Security: Trivy scans container images for CVE vulnerabilities.</a:t>
+            </a:r>
+          </a:p>
+          <a:p>
+            <a:pPr>
+              <a:spcAft>
+                <a:spcPts val="600"/>
+              </a:spcAft>
+              <a:defRPr sz="1300">
+                <a:solidFill>
+                  <a:srgbClr val="FFFFFF"/>
+                </a:solidFill>
+                <a:latin typeface="Arial"/>
+              </a:defRPr>
+            </a:pPr>
+            <a:r>
+              <a:t>•  4. Registry: Publishes tagged images to GitHub Packages (GHCR).</a:t>
+            </a:r>
+          </a:p>
+          <a:p>
+            <a:pPr>
+              <a:spcAft>
+                <a:spcPts val="600"/>
+              </a:spcAft>
+              <a:defRPr sz="1300">
+                <a:solidFill>
+                  <a:srgbClr val="FFFFFF"/>
+                </a:solidFill>
+                <a:latin typeface="Arial"/>
+              </a:defRPr>
+            </a:pPr>
+            <a:r>
+              <a:t>•  5. Deploy: Verifies automated rollout on Kubernetes cluster.</a:t>
             </a:r>
           </a:p>
         </p:txBody>
@@ -10481,14 +11020,14 @@
         </p:nvSpPr>
         <p:spPr>
           <a:xfrm>
-            <a:off x="5084064" y="1426464"/>
-            <a:ext cx="6382512" cy="4462272"/>
+            <a:off x="4901184" y="1426464"/>
+            <a:ext cx="6565392" cy="2176272"/>
           </a:xfrm>
           <a:prstGeom prst="roundRect">
             <a:avLst/>
           </a:prstGeom>
           <a:solidFill>
-            <a:srgbClr val="334155"/>
+            <a:srgbClr val="2D374B"/>
           </a:solidFill>
           <a:ln>
             <a:noFill/>
@@ -10532,8 +11071,75 @@
         </p:blipFill>
         <p:spPr>
           <a:xfrm>
-            <a:off x="5120640" y="1463040"/>
-            <a:ext cx="6309360" cy="4389120"/>
+            <a:off x="4937760" y="1463040"/>
+            <a:ext cx="6492240" cy="2103120"/>
+          </a:xfrm>
+          <a:prstGeom prst="rect">
+            <a:avLst/>
+          </a:prstGeom>
+        </p:spPr>
+      </p:pic>
+      <p:sp>
+        <p:nvSpPr>
+          <p:cNvPr id="11" name="Rounded Rectangle 10"/>
+          <p:cNvSpPr/>
+          <p:nvPr/>
+        </p:nvSpPr>
+        <p:spPr>
+          <a:xfrm>
+            <a:off x="4901184" y="3712463"/>
+            <a:ext cx="6565392" cy="2176272"/>
+          </a:xfrm>
+          <a:prstGeom prst="roundRect">
+            <a:avLst/>
+          </a:prstGeom>
+          <a:solidFill>
+            <a:srgbClr val="2D374B"/>
+          </a:solidFill>
+          <a:ln>
+            <a:noFill/>
+          </a:ln>
+        </p:spPr>
+        <p:style>
+          <a:lnRef idx="1">
+            <a:schemeClr val="accent1"/>
+          </a:lnRef>
+          <a:fillRef idx="3">
+            <a:schemeClr val="accent1"/>
+          </a:fillRef>
+          <a:effectRef idx="2">
+            <a:schemeClr val="accent1"/>
+          </a:effectRef>
+          <a:fontRef idx="minor">
+            <a:schemeClr val="lt1"/>
+          </a:fontRef>
+        </p:style>
+        <p:txBody>
+          <a:bodyPr rtlCol="0" anchor="ctr"/>
+          <a:lstStyle/>
+          <a:p>
+            <a:pPr algn="ctr"/>
+          </a:p>
+        </p:txBody>
+      </p:sp>
+      <p:pic>
+        <p:nvPicPr>
+          <p:cNvPr id="12" name="Picture 11" descr="m6-trivy-scan.png"/>
+          <p:cNvPicPr>
+            <a:picLocks noChangeAspect="1"/>
+          </p:cNvPicPr>
+          <p:nvPr/>
+        </p:nvPicPr>
+        <p:blipFill>
+          <a:blip r:embed="rId3"/>
+          <a:stretch>
+            <a:fillRect/>
+          </a:stretch>
+        </p:blipFill>
+        <p:spPr>
+          <a:xfrm>
+            <a:off x="4937760" y="3749039"/>
+            <a:ext cx="6492240" cy="2103120"/>
           </a:xfrm>
           <a:prstGeom prst="rect">
             <a:avLst/>
